--- a/doc/Пример_выполнения_ДП/Prezentatsia_primer.pptx
+++ b/doc/Пример_выполнения_ДП/Prezentatsia_primer.pptx
@@ -117,17 +117,13 @@
   </p:defaultTextStyle>
   <p:extLst>
     <p:ext uri="{521415D9-36F7-43E2-AB2F-B90AF26B5E84}">
-      <p14:sectionLst xmlns:p14="http://schemas.microsoft.com/office/powerpoint/2010/main" xmlns="">
+      <p14:sectionLst xmlns:p14="http://schemas.microsoft.com/office/powerpoint/2010/main">
         <p14:section name="Раздел по умолчанию" id="{3A3F8D5D-CAE5-4EA3-ACBE-726BB9137DA1}">
           <p14:sldIdLst>
             <p14:sldId id="256"/>
             <p14:sldId id="257"/>
-            <p14:sldId id="258"/>
             <p14:sldId id="259"/>
             <p14:sldId id="260"/>
-            <p14:sldId id="261"/>
-            <p14:sldId id="262"/>
-            <p14:sldId id="263"/>
             <p14:sldId id="264"/>
             <p14:sldId id="265"/>
             <p14:sldId id="266"/>
@@ -142,6 +138,20 @@
           <p14:sldIdLst/>
         </p14:section>
       </p14:sectionLst>
+    </p:ext>
+    <p:ext uri="{EFAFB233-063F-42B5-8137-9DF3F51BA10A}">
+      <p15:sldGuideLst xmlns:p15="http://schemas.microsoft.com/office/powerpoint/2012/main">
+        <p15:guide id="1" orient="horz" pos="2160">
+          <p15:clr>
+            <a:srgbClr val="A4A3A4"/>
+          </p15:clr>
+        </p15:guide>
+        <p15:guide id="2" pos="3840">
+          <p15:clr>
+            <a:srgbClr val="A4A3A4"/>
+          </p15:clr>
+        </p15:guide>
+      </p15:sldGuideLst>
     </p:ext>
   </p:extLst>
 </p:presentation>
@@ -274,7 +284,7 @@
           </a:lstStyle>
           <a:p>
             <a:r>
-              <a:rPr lang="ru-RU" smtClean="0"/>
+              <a:rPr lang="ru-RU"/>
               <a:t>Образец заголовка</a:t>
             </a:r>
             <a:endParaRPr lang="en-US" dirty="0"/>
@@ -351,7 +361,7 @@
           </a:lstStyle>
           <a:p>
             <a:r>
-              <a:rPr lang="ru-RU" smtClean="0"/>
+              <a:rPr lang="ru-RU"/>
               <a:t>Образец подзаголовка</a:t>
             </a:r>
             <a:endParaRPr lang="en-US" dirty="0"/>
@@ -376,7 +386,7 @@
             <a:fld id="{7B9FE42E-2A42-4622-B06C-6EE27B8890A1}" type="datetimeFigureOut">
               <a:rPr lang="ru-RU" smtClean="0"/>
               <a:pPr/>
-              <a:t>17.05.2026</a:t>
+              <a:t>15.06.2026</a:t>
             </a:fld>
             <a:endParaRPr lang="ru-RU"/>
           </a:p>
@@ -428,7 +438,7 @@
     </p:spTree>
     <p:extLst>
       <p:ext uri="{BB962C8B-B14F-4D97-AF65-F5344CB8AC3E}">
-        <p14:creationId xmlns:p14="http://schemas.microsoft.com/office/powerpoint/2010/main" xmlns="" val="92681340"/>
+        <p14:creationId xmlns:p14="http://schemas.microsoft.com/office/powerpoint/2010/main" val="92681340"/>
       </p:ext>
     </p:extLst>
   </p:cSld>
@@ -471,7 +481,7 @@
           <a:lstStyle/>
           <a:p>
             <a:r>
-              <a:rPr lang="ru-RU" smtClean="0"/>
+              <a:rPr lang="ru-RU"/>
               <a:t>Образец заголовка</a:t>
             </a:r>
             <a:endParaRPr lang="en-US" dirty="0"/>
@@ -495,35 +505,35 @@
           <a:p>
             <a:pPr lvl="0"/>
             <a:r>
-              <a:rPr lang="ru-RU" smtClean="0"/>
+              <a:rPr lang="ru-RU"/>
               <a:t>Образец текста</a:t>
             </a:r>
           </a:p>
           <a:p>
             <a:pPr lvl="1"/>
             <a:r>
-              <a:rPr lang="ru-RU" smtClean="0"/>
+              <a:rPr lang="ru-RU"/>
               <a:t>Второй уровень</a:t>
             </a:r>
           </a:p>
           <a:p>
             <a:pPr lvl="2"/>
             <a:r>
-              <a:rPr lang="ru-RU" smtClean="0"/>
+              <a:rPr lang="ru-RU"/>
               <a:t>Третий уровень</a:t>
             </a:r>
           </a:p>
           <a:p>
             <a:pPr lvl="3"/>
             <a:r>
-              <a:rPr lang="ru-RU" smtClean="0"/>
+              <a:rPr lang="ru-RU"/>
               <a:t>Четвертый уровень</a:t>
             </a:r>
           </a:p>
           <a:p>
             <a:pPr lvl="4"/>
             <a:r>
-              <a:rPr lang="ru-RU" smtClean="0"/>
+              <a:rPr lang="ru-RU"/>
               <a:t>Пятый уровень</a:t>
             </a:r>
             <a:endParaRPr lang="en-US" dirty="0"/>
@@ -548,7 +558,7 @@
             <a:fld id="{7B9FE42E-2A42-4622-B06C-6EE27B8890A1}" type="datetimeFigureOut">
               <a:rPr lang="ru-RU" smtClean="0"/>
               <a:pPr/>
-              <a:t>17.05.2026</a:t>
+              <a:t>15.06.2026</a:t>
             </a:fld>
             <a:endParaRPr lang="ru-RU"/>
           </a:p>
@@ -600,7 +610,7 @@
     </p:spTree>
     <p:extLst>
       <p:ext uri="{BB962C8B-B14F-4D97-AF65-F5344CB8AC3E}">
-        <p14:creationId xmlns:p14="http://schemas.microsoft.com/office/powerpoint/2010/main" xmlns="" val="3830049817"/>
+        <p14:creationId xmlns:p14="http://schemas.microsoft.com/office/powerpoint/2010/main" val="3830049817"/>
       </p:ext>
     </p:extLst>
   </p:cSld>
@@ -686,7 +696,7 @@
           <a:lstStyle/>
           <a:p>
             <a:r>
-              <a:rPr lang="ru-RU" smtClean="0"/>
+              <a:rPr lang="ru-RU"/>
               <a:t>Образец заголовка</a:t>
             </a:r>
             <a:endParaRPr lang="en-US" dirty="0"/>
@@ -715,35 +725,35 @@
           <a:p>
             <a:pPr lvl="0"/>
             <a:r>
-              <a:rPr lang="ru-RU" smtClean="0"/>
+              <a:rPr lang="ru-RU"/>
               <a:t>Образец текста</a:t>
             </a:r>
           </a:p>
           <a:p>
             <a:pPr lvl="1"/>
             <a:r>
-              <a:rPr lang="ru-RU" smtClean="0"/>
+              <a:rPr lang="ru-RU"/>
               <a:t>Второй уровень</a:t>
             </a:r>
           </a:p>
           <a:p>
             <a:pPr lvl="2"/>
             <a:r>
-              <a:rPr lang="ru-RU" smtClean="0"/>
+              <a:rPr lang="ru-RU"/>
               <a:t>Третий уровень</a:t>
             </a:r>
           </a:p>
           <a:p>
             <a:pPr lvl="3"/>
             <a:r>
-              <a:rPr lang="ru-RU" smtClean="0"/>
+              <a:rPr lang="ru-RU"/>
               <a:t>Четвертый уровень</a:t>
             </a:r>
           </a:p>
           <a:p>
             <a:pPr lvl="4"/>
             <a:r>
-              <a:rPr lang="ru-RU" smtClean="0"/>
+              <a:rPr lang="ru-RU"/>
               <a:t>Пятый уровень</a:t>
             </a:r>
             <a:endParaRPr lang="en-US" dirty="0"/>
@@ -773,7 +783,7 @@
             <a:fld id="{7B9FE42E-2A42-4622-B06C-6EE27B8890A1}" type="datetimeFigureOut">
               <a:rPr lang="ru-RU" smtClean="0"/>
               <a:pPr/>
-              <a:t>17.05.2026</a:t>
+              <a:t>15.06.2026</a:t>
             </a:fld>
             <a:endParaRPr lang="ru-RU"/>
           </a:p>
@@ -835,7 +845,7 @@
     </p:spTree>
     <p:extLst>
       <p:ext uri="{BB962C8B-B14F-4D97-AF65-F5344CB8AC3E}">
-        <p14:creationId xmlns:p14="http://schemas.microsoft.com/office/powerpoint/2010/main" xmlns="" val="816505752"/>
+        <p14:creationId xmlns:p14="http://schemas.microsoft.com/office/powerpoint/2010/main" val="816505752"/>
       </p:ext>
     </p:extLst>
   </p:cSld>
@@ -878,7 +888,7 @@
           <a:lstStyle/>
           <a:p>
             <a:r>
-              <a:rPr lang="ru-RU" smtClean="0"/>
+              <a:rPr lang="ru-RU"/>
               <a:t>Образец заголовка</a:t>
             </a:r>
             <a:endParaRPr lang="en-US" dirty="0"/>
@@ -902,35 +912,35 @@
           <a:p>
             <a:pPr lvl="0"/>
             <a:r>
-              <a:rPr lang="ru-RU" smtClean="0"/>
+              <a:rPr lang="ru-RU"/>
               <a:t>Образец текста</a:t>
             </a:r>
           </a:p>
           <a:p>
             <a:pPr lvl="1"/>
             <a:r>
-              <a:rPr lang="ru-RU" smtClean="0"/>
+              <a:rPr lang="ru-RU"/>
               <a:t>Второй уровень</a:t>
             </a:r>
           </a:p>
           <a:p>
             <a:pPr lvl="2"/>
             <a:r>
-              <a:rPr lang="ru-RU" smtClean="0"/>
+              <a:rPr lang="ru-RU"/>
               <a:t>Третий уровень</a:t>
             </a:r>
           </a:p>
           <a:p>
             <a:pPr lvl="3"/>
             <a:r>
-              <a:rPr lang="ru-RU" smtClean="0"/>
+              <a:rPr lang="ru-RU"/>
               <a:t>Четвертый уровень</a:t>
             </a:r>
           </a:p>
           <a:p>
             <a:pPr lvl="4"/>
             <a:r>
-              <a:rPr lang="ru-RU" smtClean="0"/>
+              <a:rPr lang="ru-RU"/>
               <a:t>Пятый уровень</a:t>
             </a:r>
             <a:endParaRPr lang="en-US" dirty="0"/>
@@ -955,7 +965,7 @@
             <a:fld id="{7B9FE42E-2A42-4622-B06C-6EE27B8890A1}" type="datetimeFigureOut">
               <a:rPr lang="ru-RU" smtClean="0"/>
               <a:pPr/>
-              <a:t>17.05.2026</a:t>
+              <a:t>15.06.2026</a:t>
             </a:fld>
             <a:endParaRPr lang="ru-RU"/>
           </a:p>
@@ -1007,7 +1017,7 @@
     </p:spTree>
     <p:extLst>
       <p:ext uri="{BB962C8B-B14F-4D97-AF65-F5344CB8AC3E}">
-        <p14:creationId xmlns:p14="http://schemas.microsoft.com/office/powerpoint/2010/main" xmlns="" val="2242510636"/>
+        <p14:creationId xmlns:p14="http://schemas.microsoft.com/office/powerpoint/2010/main" val="2242510636"/>
       </p:ext>
     </p:extLst>
   </p:cSld>
@@ -1144,7 +1154,7 @@
           </a:lstStyle>
           <a:p>
             <a:r>
-              <a:rPr lang="ru-RU" smtClean="0"/>
+              <a:rPr lang="ru-RU"/>
               <a:t>Образец заголовка</a:t>
             </a:r>
             <a:endParaRPr lang="en-US" dirty="0"/>
@@ -1264,7 +1274,7 @@
           <a:p>
             <a:pPr lvl="0"/>
             <a:r>
-              <a:rPr lang="ru-RU" smtClean="0"/>
+              <a:rPr lang="ru-RU"/>
               <a:t>Образец текста</a:t>
             </a:r>
           </a:p>
@@ -1296,7 +1306,7 @@
             <a:fld id="{7B9FE42E-2A42-4622-B06C-6EE27B8890A1}" type="datetimeFigureOut">
               <a:rPr lang="ru-RU" smtClean="0"/>
               <a:pPr/>
-              <a:t>17.05.2026</a:t>
+              <a:t>15.06.2026</a:t>
             </a:fld>
             <a:endParaRPr lang="ru-RU"/>
           </a:p>
@@ -1364,7 +1374,7 @@
     </p:spTree>
     <p:extLst>
       <p:ext uri="{BB962C8B-B14F-4D97-AF65-F5344CB8AC3E}">
-        <p14:creationId xmlns:p14="http://schemas.microsoft.com/office/powerpoint/2010/main" xmlns="" val="3363658144"/>
+        <p14:creationId xmlns:p14="http://schemas.microsoft.com/office/powerpoint/2010/main" val="3363658144"/>
       </p:ext>
     </p:extLst>
   </p:cSld>
@@ -1407,7 +1417,7 @@
           <a:lstStyle/>
           <a:p>
             <a:r>
-              <a:rPr lang="ru-RU" smtClean="0"/>
+              <a:rPr lang="ru-RU"/>
               <a:t>Образец заголовка</a:t>
             </a:r>
             <a:endParaRPr lang="en-US" dirty="0"/>
@@ -1464,35 +1474,35 @@
           <a:p>
             <a:pPr lvl="0"/>
             <a:r>
-              <a:rPr lang="ru-RU" smtClean="0"/>
+              <a:rPr lang="ru-RU"/>
               <a:t>Образец текста</a:t>
             </a:r>
           </a:p>
           <a:p>
             <a:pPr lvl="1"/>
             <a:r>
-              <a:rPr lang="ru-RU" smtClean="0"/>
+              <a:rPr lang="ru-RU"/>
               <a:t>Второй уровень</a:t>
             </a:r>
           </a:p>
           <a:p>
             <a:pPr lvl="2"/>
             <a:r>
-              <a:rPr lang="ru-RU" smtClean="0"/>
+              <a:rPr lang="ru-RU"/>
               <a:t>Третий уровень</a:t>
             </a:r>
           </a:p>
           <a:p>
             <a:pPr lvl="3"/>
             <a:r>
-              <a:rPr lang="ru-RU" smtClean="0"/>
+              <a:rPr lang="ru-RU"/>
               <a:t>Четвертый уровень</a:t>
             </a:r>
           </a:p>
           <a:p>
             <a:pPr lvl="4"/>
             <a:r>
-              <a:rPr lang="ru-RU" smtClean="0"/>
+              <a:rPr lang="ru-RU"/>
               <a:t>Пятый уровень</a:t>
             </a:r>
             <a:endParaRPr lang="en-US" dirty="0"/>
@@ -1549,35 +1559,35 @@
           <a:p>
             <a:pPr lvl="0"/>
             <a:r>
-              <a:rPr lang="ru-RU" smtClean="0"/>
+              <a:rPr lang="ru-RU"/>
               <a:t>Образец текста</a:t>
             </a:r>
           </a:p>
           <a:p>
             <a:pPr lvl="1"/>
             <a:r>
-              <a:rPr lang="ru-RU" smtClean="0"/>
+              <a:rPr lang="ru-RU"/>
               <a:t>Второй уровень</a:t>
             </a:r>
           </a:p>
           <a:p>
             <a:pPr lvl="2"/>
             <a:r>
-              <a:rPr lang="ru-RU" smtClean="0"/>
+              <a:rPr lang="ru-RU"/>
               <a:t>Третий уровень</a:t>
             </a:r>
           </a:p>
           <a:p>
             <a:pPr lvl="3"/>
             <a:r>
-              <a:rPr lang="ru-RU" smtClean="0"/>
+              <a:rPr lang="ru-RU"/>
               <a:t>Четвертый уровень</a:t>
             </a:r>
           </a:p>
           <a:p>
             <a:pPr lvl="4"/>
             <a:r>
-              <a:rPr lang="ru-RU" smtClean="0"/>
+              <a:rPr lang="ru-RU"/>
               <a:t>Пятый уровень</a:t>
             </a:r>
             <a:endParaRPr lang="en-US" dirty="0"/>
@@ -1602,7 +1612,7 @@
             <a:fld id="{7B9FE42E-2A42-4622-B06C-6EE27B8890A1}" type="datetimeFigureOut">
               <a:rPr lang="ru-RU" smtClean="0"/>
               <a:pPr/>
-              <a:t>17.05.2026</a:t>
+              <a:t>15.06.2026</a:t>
             </a:fld>
             <a:endParaRPr lang="ru-RU"/>
           </a:p>
@@ -1654,7 +1664,7 @@
     </p:spTree>
     <p:extLst>
       <p:ext uri="{BB962C8B-B14F-4D97-AF65-F5344CB8AC3E}">
-        <p14:creationId xmlns:p14="http://schemas.microsoft.com/office/powerpoint/2010/main" xmlns="" val="1173105165"/>
+        <p14:creationId xmlns:p14="http://schemas.microsoft.com/office/powerpoint/2010/main" val="1173105165"/>
       </p:ext>
     </p:extLst>
   </p:cSld>
@@ -1697,7 +1707,7 @@
           <a:lstStyle/>
           <a:p>
             <a:r>
-              <a:rPr lang="ru-RU" smtClean="0"/>
+              <a:rPr lang="ru-RU"/>
               <a:t>Образец заголовка</a:t>
             </a:r>
             <a:endParaRPr lang="en-US" dirty="0"/>
@@ -1765,7 +1775,7 @@
           <a:p>
             <a:pPr lvl="0"/>
             <a:r>
-              <a:rPr lang="ru-RU" smtClean="0"/>
+              <a:rPr lang="ru-RU"/>
               <a:t>Образец текста</a:t>
             </a:r>
           </a:p>
@@ -1821,35 +1831,35 @@
           <a:p>
             <a:pPr lvl="0"/>
             <a:r>
-              <a:rPr lang="ru-RU" smtClean="0"/>
+              <a:rPr lang="ru-RU"/>
               <a:t>Образец текста</a:t>
             </a:r>
           </a:p>
           <a:p>
             <a:pPr lvl="1"/>
             <a:r>
-              <a:rPr lang="ru-RU" smtClean="0"/>
+              <a:rPr lang="ru-RU"/>
               <a:t>Второй уровень</a:t>
             </a:r>
           </a:p>
           <a:p>
             <a:pPr lvl="2"/>
             <a:r>
-              <a:rPr lang="ru-RU" smtClean="0"/>
+              <a:rPr lang="ru-RU"/>
               <a:t>Третий уровень</a:t>
             </a:r>
           </a:p>
           <a:p>
             <a:pPr lvl="3"/>
             <a:r>
-              <a:rPr lang="ru-RU" smtClean="0"/>
+              <a:rPr lang="ru-RU"/>
               <a:t>Четвертый уровень</a:t>
             </a:r>
           </a:p>
           <a:p>
             <a:pPr lvl="4"/>
             <a:r>
-              <a:rPr lang="ru-RU" smtClean="0"/>
+              <a:rPr lang="ru-RU"/>
               <a:t>Пятый уровень</a:t>
             </a:r>
             <a:endParaRPr lang="en-US" dirty="0"/>
@@ -1917,7 +1927,7 @@
           <a:p>
             <a:pPr lvl="0"/>
             <a:r>
-              <a:rPr lang="ru-RU" smtClean="0"/>
+              <a:rPr lang="ru-RU"/>
               <a:t>Образец текста</a:t>
             </a:r>
           </a:p>
@@ -1973,35 +1983,35 @@
           <a:p>
             <a:pPr lvl="0"/>
             <a:r>
-              <a:rPr lang="ru-RU" smtClean="0"/>
+              <a:rPr lang="ru-RU"/>
               <a:t>Образец текста</a:t>
             </a:r>
           </a:p>
           <a:p>
             <a:pPr lvl="1"/>
             <a:r>
-              <a:rPr lang="ru-RU" smtClean="0"/>
+              <a:rPr lang="ru-RU"/>
               <a:t>Второй уровень</a:t>
             </a:r>
           </a:p>
           <a:p>
             <a:pPr lvl="2"/>
             <a:r>
-              <a:rPr lang="ru-RU" smtClean="0"/>
+              <a:rPr lang="ru-RU"/>
               <a:t>Третий уровень</a:t>
             </a:r>
           </a:p>
           <a:p>
             <a:pPr lvl="3"/>
             <a:r>
-              <a:rPr lang="ru-RU" smtClean="0"/>
+              <a:rPr lang="ru-RU"/>
               <a:t>Четвертый уровень</a:t>
             </a:r>
           </a:p>
           <a:p>
             <a:pPr lvl="4"/>
             <a:r>
-              <a:rPr lang="ru-RU" smtClean="0"/>
+              <a:rPr lang="ru-RU"/>
               <a:t>Пятый уровень</a:t>
             </a:r>
             <a:endParaRPr lang="en-US" dirty="0"/>
@@ -2026,7 +2036,7 @@
             <a:fld id="{7B9FE42E-2A42-4622-B06C-6EE27B8890A1}" type="datetimeFigureOut">
               <a:rPr lang="ru-RU" smtClean="0"/>
               <a:pPr/>
-              <a:t>17.05.2026</a:t>
+              <a:t>15.06.2026</a:t>
             </a:fld>
             <a:endParaRPr lang="ru-RU"/>
           </a:p>
@@ -2078,7 +2088,7 @@
     </p:spTree>
     <p:extLst>
       <p:ext uri="{BB962C8B-B14F-4D97-AF65-F5344CB8AC3E}">
-        <p14:creationId xmlns:p14="http://schemas.microsoft.com/office/powerpoint/2010/main" xmlns="" val="587082134"/>
+        <p14:creationId xmlns:p14="http://schemas.microsoft.com/office/powerpoint/2010/main" val="587082134"/>
       </p:ext>
     </p:extLst>
   </p:cSld>
@@ -2121,7 +2131,7 @@
           <a:lstStyle/>
           <a:p>
             <a:r>
-              <a:rPr lang="ru-RU" smtClean="0"/>
+              <a:rPr lang="ru-RU"/>
               <a:t>Образец заголовка</a:t>
             </a:r>
             <a:endParaRPr lang="en-US" dirty="0"/>
@@ -2146,7 +2156,7 @@
             <a:fld id="{7B9FE42E-2A42-4622-B06C-6EE27B8890A1}" type="datetimeFigureOut">
               <a:rPr lang="ru-RU" smtClean="0"/>
               <a:pPr/>
-              <a:t>17.05.2026</a:t>
+              <a:t>15.06.2026</a:t>
             </a:fld>
             <a:endParaRPr lang="ru-RU"/>
           </a:p>
@@ -2198,7 +2208,7 @@
     </p:spTree>
     <p:extLst>
       <p:ext uri="{BB962C8B-B14F-4D97-AF65-F5344CB8AC3E}">
-        <p14:creationId xmlns:p14="http://schemas.microsoft.com/office/powerpoint/2010/main" xmlns="" val="1226050350"/>
+        <p14:creationId xmlns:p14="http://schemas.microsoft.com/office/powerpoint/2010/main" val="1226050350"/>
       </p:ext>
     </p:extLst>
   </p:cSld>
@@ -2243,7 +2253,7 @@
             <a:fld id="{7B9FE42E-2A42-4622-B06C-6EE27B8890A1}" type="datetimeFigureOut">
               <a:rPr lang="ru-RU" smtClean="0"/>
               <a:pPr/>
-              <a:t>17.05.2026</a:t>
+              <a:t>15.06.2026</a:t>
             </a:fld>
             <a:endParaRPr lang="ru-RU"/>
           </a:p>
@@ -2295,7 +2305,7 @@
     </p:spTree>
     <p:extLst>
       <p:ext uri="{BB962C8B-B14F-4D97-AF65-F5344CB8AC3E}">
-        <p14:creationId xmlns:p14="http://schemas.microsoft.com/office/powerpoint/2010/main" xmlns="" val="334298117"/>
+        <p14:creationId xmlns:p14="http://schemas.microsoft.com/office/powerpoint/2010/main" val="334298117"/>
       </p:ext>
     </p:extLst>
   </p:cSld>
@@ -2338,7 +2348,7 @@
           <a:lstStyle/>
           <a:p>
             <a:r>
-              <a:rPr lang="ru-RU" smtClean="0"/>
+              <a:rPr lang="ru-RU"/>
               <a:t>Образец заголовка</a:t>
             </a:r>
             <a:endParaRPr lang="en-US" dirty="0"/>
@@ -2395,35 +2405,35 @@
           <a:p>
             <a:pPr lvl="0"/>
             <a:r>
-              <a:rPr lang="ru-RU" smtClean="0"/>
+              <a:rPr lang="ru-RU"/>
               <a:t>Образец текста</a:t>
             </a:r>
           </a:p>
           <a:p>
             <a:pPr lvl="1"/>
             <a:r>
-              <a:rPr lang="ru-RU" smtClean="0"/>
+              <a:rPr lang="ru-RU"/>
               <a:t>Второй уровень</a:t>
             </a:r>
           </a:p>
           <a:p>
             <a:pPr lvl="2"/>
             <a:r>
-              <a:rPr lang="ru-RU" smtClean="0"/>
+              <a:rPr lang="ru-RU"/>
               <a:t>Третий уровень</a:t>
             </a:r>
           </a:p>
           <a:p>
             <a:pPr lvl="3"/>
             <a:r>
-              <a:rPr lang="ru-RU" smtClean="0"/>
+              <a:rPr lang="ru-RU"/>
               <a:t>Четвертый уровень</a:t>
             </a:r>
           </a:p>
           <a:p>
             <a:pPr lvl="4"/>
             <a:r>
-              <a:rPr lang="ru-RU" smtClean="0"/>
+              <a:rPr lang="ru-RU"/>
               <a:t>Пятый уровень</a:t>
             </a:r>
             <a:endParaRPr lang="en-US" dirty="0"/>
@@ -2494,7 +2504,7 @@
           <a:p>
             <a:pPr lvl="0"/>
             <a:r>
-              <a:rPr lang="ru-RU" smtClean="0"/>
+              <a:rPr lang="ru-RU"/>
               <a:t>Образец текста</a:t>
             </a:r>
           </a:p>
@@ -2518,7 +2528,7 @@
             <a:fld id="{7B9FE42E-2A42-4622-B06C-6EE27B8890A1}" type="datetimeFigureOut">
               <a:rPr lang="ru-RU" smtClean="0"/>
               <a:pPr/>
-              <a:t>17.05.2026</a:t>
+              <a:t>15.06.2026</a:t>
             </a:fld>
             <a:endParaRPr lang="ru-RU"/>
           </a:p>
@@ -2570,7 +2580,7 @@
     </p:spTree>
     <p:extLst>
       <p:ext uri="{BB962C8B-B14F-4D97-AF65-F5344CB8AC3E}">
-        <p14:creationId xmlns:p14="http://schemas.microsoft.com/office/powerpoint/2010/main" xmlns="" val="934180331"/>
+        <p14:creationId xmlns:p14="http://schemas.microsoft.com/office/powerpoint/2010/main" val="934180331"/>
       </p:ext>
     </p:extLst>
   </p:cSld>
@@ -2613,7 +2623,7 @@
           <a:lstStyle/>
           <a:p>
             <a:r>
-              <a:rPr lang="ru-RU" smtClean="0"/>
+              <a:rPr lang="ru-RU"/>
               <a:t>Образец заголовка</a:t>
             </a:r>
             <a:endParaRPr lang="en-US" dirty="0"/>
@@ -2690,7 +2700,7 @@
           </a:lstStyle>
           <a:p>
             <a:r>
-              <a:rPr lang="ru-RU" smtClean="0"/>
+              <a:rPr lang="ru-RU"/>
               <a:t>Вставка рисунка</a:t>
             </a:r>
             <a:endParaRPr lang="en-US" dirty="0"/>
@@ -2761,7 +2771,7 @@
           <a:p>
             <a:pPr lvl="0"/>
             <a:r>
-              <a:rPr lang="ru-RU" smtClean="0"/>
+              <a:rPr lang="ru-RU"/>
               <a:t>Образец текста</a:t>
             </a:r>
           </a:p>
@@ -2785,7 +2795,7 @@
             <a:fld id="{7B9FE42E-2A42-4622-B06C-6EE27B8890A1}" type="datetimeFigureOut">
               <a:rPr lang="ru-RU" smtClean="0"/>
               <a:pPr/>
-              <a:t>17.05.2026</a:t>
+              <a:t>15.06.2026</a:t>
             </a:fld>
             <a:endParaRPr lang="ru-RU"/>
           </a:p>
@@ -2837,7 +2847,7 @@
     </p:spTree>
     <p:extLst>
       <p:ext uri="{BB962C8B-B14F-4D97-AF65-F5344CB8AC3E}">
-        <p14:creationId xmlns:p14="http://schemas.microsoft.com/office/powerpoint/2010/main" xmlns="" val="3246666392"/>
+        <p14:creationId xmlns:p14="http://schemas.microsoft.com/office/powerpoint/2010/main" val="3246666392"/>
       </p:ext>
     </p:extLst>
   </p:cSld>
@@ -2933,7 +2943,7 @@
           <a:lstStyle/>
           <a:p>
             <a:r>
-              <a:rPr lang="ru-RU" smtClean="0"/>
+              <a:rPr lang="ru-RU"/>
               <a:t>Образец заголовка</a:t>
             </a:r>
             <a:endParaRPr lang="en-US" dirty="0"/>
@@ -2967,35 +2977,35 @@
           <a:p>
             <a:pPr lvl="0"/>
             <a:r>
-              <a:rPr lang="ru-RU" smtClean="0"/>
+              <a:rPr lang="ru-RU"/>
               <a:t>Образец текста</a:t>
             </a:r>
           </a:p>
           <a:p>
             <a:pPr lvl="1"/>
             <a:r>
-              <a:rPr lang="ru-RU" smtClean="0"/>
+              <a:rPr lang="ru-RU"/>
               <a:t>Второй уровень</a:t>
             </a:r>
           </a:p>
           <a:p>
             <a:pPr lvl="2"/>
             <a:r>
-              <a:rPr lang="ru-RU" smtClean="0"/>
+              <a:rPr lang="ru-RU"/>
               <a:t>Третий уровень</a:t>
             </a:r>
           </a:p>
           <a:p>
             <a:pPr lvl="3"/>
             <a:r>
-              <a:rPr lang="ru-RU" smtClean="0"/>
+              <a:rPr lang="ru-RU"/>
               <a:t>Четвертый уровень</a:t>
             </a:r>
           </a:p>
           <a:p>
             <a:pPr lvl="4"/>
             <a:r>
-              <a:rPr lang="ru-RU" smtClean="0"/>
+              <a:rPr lang="ru-RU"/>
               <a:t>Пятый уровень</a:t>
             </a:r>
             <a:endParaRPr lang="en-US" dirty="0"/>
@@ -3036,7 +3046,7 @@
             <a:fld id="{7B9FE42E-2A42-4622-B06C-6EE27B8890A1}" type="datetimeFigureOut">
               <a:rPr lang="ru-RU" smtClean="0"/>
               <a:pPr/>
-              <a:t>17.05.2026</a:t>
+              <a:t>15.06.2026</a:t>
             </a:fld>
             <a:endParaRPr lang="ru-RU"/>
           </a:p>
@@ -3120,7 +3130,7 @@
     </p:spTree>
     <p:extLst>
       <p:ext uri="{BB962C8B-B14F-4D97-AF65-F5344CB8AC3E}">
-        <p14:creationId xmlns:p14="http://schemas.microsoft.com/office/powerpoint/2010/main" xmlns="" val="2209525957"/>
+        <p14:creationId xmlns:p14="http://schemas.microsoft.com/office/powerpoint/2010/main" val="2209525957"/>
       </p:ext>
     </p:extLst>
   </p:cSld>
@@ -3504,7 +3514,7 @@
           <a:blip r:embed="rId2" cstate="print">
             <a:extLst>
               <a:ext uri="{28A0092B-C50C-407E-A947-70E740481C1C}">
-                <a14:useLocalDpi xmlns:a14="http://schemas.microsoft.com/office/drawing/2010/main" xmlns="" val="0"/>
+                <a14:useLocalDpi xmlns:a14="http://schemas.microsoft.com/office/drawing/2010/main" val="0"/>
               </a:ext>
             </a:extLst>
           </a:blip>
@@ -3522,7 +3532,7 @@
           <a:noFill/>
           <a:extLst>
             <a:ext uri="{909E8E84-426E-40DD-AFC4-6F175D3DCCD1}">
-              <a14:hiddenFill xmlns:a14="http://schemas.microsoft.com/office/drawing/2010/main" xmlns="">
+              <a14:hiddenFill xmlns:a14="http://schemas.microsoft.com/office/drawing/2010/main">
                 <a:solidFill>
                   <a:srgbClr val="FFFFFF"/>
                 </a:solidFill>
@@ -3549,7 +3559,7 @@
           <a:lstStyle/>
           <a:p>
             <a:r>
-              <a:rPr lang="ru-RU" dirty="0" smtClean="0">
+              <a:rPr lang="ru-RU" dirty="0">
                 <a:solidFill>
                   <a:schemeClr val="bg1">
                     <a:lumMod val="95000"/>
@@ -3558,13 +3568,6 @@
               </a:rPr>
               <a:t>ВЫПУСКНАЯ КВАЛИФИКАЦИОННАЯ РАБОТА</a:t>
             </a:r>
-            <a:endParaRPr lang="ru-RU" dirty="0">
-              <a:solidFill>
-                <a:schemeClr val="bg1">
-                  <a:lumMod val="95000"/>
-                </a:schemeClr>
-              </a:solidFill>
-            </a:endParaRPr>
           </a:p>
         </p:txBody>
       </p:sp>
@@ -3580,18 +3583,18 @@
         </p:nvSpPr>
         <p:spPr>
           <a:xfrm>
-            <a:off x="2725783" y="4375186"/>
-            <a:ext cx="6870845" cy="928334"/>
+            <a:off x="2130357" y="4375186"/>
+            <a:ext cx="8319929" cy="1183840"/>
           </a:xfrm>
         </p:spPr>
         <p:txBody>
           <a:bodyPr>
-            <a:normAutofit/>
+            <a:normAutofit lnSpcReduction="10000"/>
           </a:bodyPr>
           <a:lstStyle/>
           <a:p>
             <a:r>
-              <a:rPr lang="ru-RU" sz="2800" b="1" dirty="0" smtClean="0">
+              <a:rPr lang="ru-RU" sz="2800" b="1" dirty="0">
                 <a:solidFill>
                   <a:schemeClr val="tx2">
                     <a:lumMod val="75000"/>
@@ -3601,7 +3604,7 @@
               <a:t>Тема</a:t>
             </a:r>
             <a:r>
-              <a:rPr lang="en-US" sz="2800" b="1" dirty="0" smtClean="0">
+              <a:rPr lang="en-US" sz="2800" b="1" dirty="0">
                 <a:solidFill>
                   <a:schemeClr val="tx2">
                     <a:lumMod val="75000"/>
@@ -3618,7 +3621,7 @@
                   </a:schemeClr>
                 </a:solidFill>
               </a:rPr>
-              <a:t>Информационная система по ведению базы данных музея ПАО ЗМЗ </a:t>
+              <a:t>Автоматизированная информационная система для обслуживания клиентов строительной компании на базе платформы .NET</a:t>
             </a:r>
           </a:p>
         </p:txBody>
@@ -3650,7 +3653,7 @@
               </a:spcAft>
             </a:pPr>
             <a:r>
-              <a:rPr lang="ru-RU" dirty="0" smtClean="0">
+              <a:rPr lang="ru-RU" dirty="0">
                 <a:solidFill>
                   <a:srgbClr val="000000"/>
                 </a:solidFill>
@@ -3658,31 +3661,9 @@
                 <a:latin typeface="Times New Roman" panose="02020603050405020304" pitchFamily="18" charset="0"/>
                 <a:ea typeface="Times New Roman" panose="02020603050405020304" pitchFamily="18" charset="0"/>
               </a:rPr>
-              <a:t>Министерство </a:t>
-            </a:r>
-            <a:r>
-              <a:rPr lang="ru-RU" dirty="0" smtClean="0">
-                <a:solidFill>
-                  <a:srgbClr val="000000"/>
-                </a:solidFill>
-                <a:effectLst/>
-                <a:latin typeface="Times New Roman" panose="02020603050405020304" pitchFamily="18" charset="0"/>
-                <a:ea typeface="Times New Roman" panose="02020603050405020304" pitchFamily="18" charset="0"/>
-              </a:rPr>
-              <a:t>образования </a:t>
-            </a:r>
-            <a:r>
-              <a:rPr lang="ru-RU" dirty="0" smtClean="0">
-                <a:solidFill>
-                  <a:srgbClr val="000000"/>
-                </a:solidFill>
-                <a:effectLst/>
-                <a:latin typeface="Times New Roman" panose="02020603050405020304" pitchFamily="18" charset="0"/>
-                <a:ea typeface="Times New Roman" panose="02020603050405020304" pitchFamily="18" charset="0"/>
-              </a:rPr>
-              <a:t>Нижегородской области</a:t>
-            </a:r>
-            <a:endParaRPr lang="ru-RU" sz="1600" dirty="0" smtClean="0">
+              <a:t>Министерство образования Нижегородской области</a:t>
+            </a:r>
+            <a:endParaRPr lang="ru-RU" sz="1600" dirty="0">
               <a:effectLst/>
               <a:latin typeface="Times New Roman" panose="02020603050405020304" pitchFamily="18" charset="0"/>
               <a:ea typeface="Times New Roman" panose="02020603050405020304" pitchFamily="18" charset="0"/>
@@ -3695,7 +3676,7 @@
               </a:spcAft>
             </a:pPr>
             <a:r>
-              <a:rPr lang="ru-RU" dirty="0" smtClean="0">
+              <a:rPr lang="ru-RU" dirty="0">
                 <a:solidFill>
                   <a:srgbClr val="000000"/>
                 </a:solidFill>
@@ -3706,7 +3687,7 @@
               <a:t>Государственное бюджетное профессиональное </a:t>
             </a:r>
             <a:br>
-              <a:rPr lang="ru-RU" dirty="0" smtClean="0">
+              <a:rPr lang="ru-RU" dirty="0">
                 <a:solidFill>
                   <a:srgbClr val="000000"/>
                 </a:solidFill>
@@ -3716,7 +3697,7 @@
               </a:rPr>
             </a:br>
             <a:r>
-              <a:rPr lang="ru-RU" dirty="0" smtClean="0">
+              <a:rPr lang="ru-RU" dirty="0">
                 <a:solidFill>
                   <a:srgbClr val="000000"/>
                 </a:solidFill>
@@ -3726,7 +3707,7 @@
               </a:rPr>
               <a:t>образовательное учреждение</a:t>
             </a:r>
-            <a:endParaRPr lang="ru-RU" sz="1600" dirty="0" smtClean="0">
+            <a:endParaRPr lang="ru-RU" sz="1600" dirty="0">
               <a:effectLst/>
               <a:latin typeface="Times New Roman" panose="02020603050405020304" pitchFamily="18" charset="0"/>
               <a:ea typeface="Times New Roman" panose="02020603050405020304" pitchFamily="18" charset="0"/>
@@ -3739,7 +3720,7 @@
               </a:spcAft>
             </a:pPr>
             <a:r>
-              <a:rPr lang="ru-RU" dirty="0" smtClean="0">
+              <a:rPr lang="ru-RU" dirty="0">
                 <a:solidFill>
                   <a:srgbClr val="000000"/>
                 </a:solidFill>
@@ -3749,7 +3730,7 @@
               </a:rPr>
               <a:t> «Заволжский автомоторный техникум»</a:t>
             </a:r>
-            <a:endParaRPr lang="ru-RU" sz="1600" dirty="0" smtClean="0">
+            <a:endParaRPr lang="ru-RU" sz="1600" dirty="0">
               <a:effectLst/>
               <a:latin typeface="Times New Roman" panose="02020603050405020304" pitchFamily="18" charset="0"/>
               <a:ea typeface="Times New Roman" panose="02020603050405020304" pitchFamily="18" charset="0"/>
@@ -3762,7 +3743,7 @@
               </a:spcAft>
             </a:pPr>
             <a:r>
-              <a:rPr lang="ru-RU" dirty="0" smtClean="0">
+              <a:rPr lang="ru-RU" dirty="0">
                 <a:solidFill>
                   <a:srgbClr val="000000"/>
                 </a:solidFill>
@@ -3807,29 +3788,23 @@
               </a:spcAft>
             </a:pPr>
             <a:r>
-              <a:rPr lang="ru-RU" sz="2000" dirty="0" smtClean="0">
+              <a:rPr lang="ru-RU" sz="2000" dirty="0">
                 <a:solidFill>
                   <a:srgbClr val="000000"/>
                 </a:solidFill>
                 <a:latin typeface="Times New Roman" panose="02020603050405020304" pitchFamily="18" charset="0"/>
                 <a:ea typeface="Times New Roman" panose="02020603050405020304" pitchFamily="18" charset="0"/>
               </a:rPr>
-              <a:t>Выполнила: </a:t>
-            </a:r>
-            <a:r>
-              <a:rPr lang="ru-RU" sz="2000" dirty="0" smtClean="0">
-                <a:solidFill>
-                  <a:srgbClr val="FF0000"/>
-                </a:solidFill>
+              <a:t>Выполнил: </a:t>
+            </a:r>
+            <a:r>
+              <a:rPr lang="ru-RU" sz="2000" dirty="0">
                 <a:latin typeface="Times New Roman" panose="02020603050405020304" pitchFamily="18" charset="0"/>
                 <a:ea typeface="Times New Roman" panose="02020603050405020304" pitchFamily="18" charset="0"/>
               </a:rPr>
-              <a:t>Татаринцева Анна Александровна, группа ПС-15</a:t>
+              <a:t>Конкин Никита Алексеевич, группа ИС-22Б</a:t>
             </a:r>
             <a:endParaRPr lang="ru-RU" sz="2000" dirty="0">
-              <a:solidFill>
-                <a:srgbClr val="FF0000"/>
-              </a:solidFill>
               <a:effectLst/>
               <a:latin typeface="Times New Roman" panose="02020603050405020304" pitchFamily="18" charset="0"/>
               <a:ea typeface="Times New Roman" panose="02020603050405020304" pitchFamily="18" charset="0"/>
@@ -3864,29 +3839,33 @@
               </a:spcAft>
             </a:pPr>
             <a:r>
-              <a:rPr lang="ru-RU" sz="2000" dirty="0" smtClean="0">
+              <a:rPr lang="ru-RU" sz="2000" dirty="0">
                 <a:solidFill>
                   <a:srgbClr val="000000"/>
                 </a:solidFill>
                 <a:latin typeface="Times New Roman" panose="02020603050405020304" pitchFamily="18" charset="0"/>
                 <a:ea typeface="Times New Roman" panose="02020603050405020304" pitchFamily="18" charset="0"/>
               </a:rPr>
-              <a:t>Руководитель: </a:t>
-            </a:r>
-            <a:r>
-              <a:rPr lang="ru-RU" sz="2000" dirty="0" smtClean="0">
+              <a:t>Руководитель: Фомичева Ольга Владиславовна</a:t>
+            </a:r>
+            <a:r>
+              <a:rPr lang="ru-RU" sz="2000" dirty="0">
                 <a:solidFill>
                   <a:srgbClr val="FF0000"/>
                 </a:solidFill>
                 <a:latin typeface="Times New Roman" panose="02020603050405020304" pitchFamily="18" charset="0"/>
                 <a:ea typeface="Times New Roman" panose="02020603050405020304" pitchFamily="18" charset="0"/>
               </a:rPr>
-              <a:t>Карпушева Ирина Александровна, преподаватель</a:t>
+              <a:t>, </a:t>
+            </a:r>
+            <a:r>
+              <a:rPr lang="ru-RU" sz="2000" dirty="0">
+                <a:latin typeface="Times New Roman" panose="02020603050405020304" pitchFamily="18" charset="0"/>
+                <a:ea typeface="Times New Roman" panose="02020603050405020304" pitchFamily="18" charset="0"/>
+              </a:rPr>
+              <a:t>преподаватель</a:t>
             </a:r>
             <a:endParaRPr lang="ru-RU" sz="2000" dirty="0">
-              <a:solidFill>
-                <a:srgbClr val="FF0000"/>
-              </a:solidFill>
               <a:effectLst/>
               <a:latin typeface="Times New Roman" panose="02020603050405020304" pitchFamily="18" charset="0"/>
               <a:ea typeface="Times New Roman" panose="02020603050405020304" pitchFamily="18" charset="0"/>
@@ -3921,7 +3900,7 @@
               </a:spcAft>
             </a:pPr>
             <a:r>
-              <a:rPr lang="ru-RU" sz="2000" dirty="0" smtClean="0">
+              <a:rPr lang="ru-RU" sz="2000" dirty="0">
                 <a:solidFill>
                   <a:srgbClr val="000000"/>
                 </a:solidFill>
@@ -3938,7 +3917,7 @@
               </a:spcAft>
             </a:pPr>
             <a:r>
-              <a:rPr lang="ru-RU" sz="2000" dirty="0" smtClean="0">
+              <a:rPr lang="ru-RU" sz="2000" dirty="0">
                 <a:solidFill>
                   <a:srgbClr val="000000"/>
                 </a:solidFill>
@@ -3968,7 +3947,7 @@
           <a:blip r:embed="rId3" cstate="print">
             <a:extLst>
               <a:ext uri="{28A0092B-C50C-407E-A947-70E740481C1C}">
-                <a14:useLocalDpi xmlns:a14="http://schemas.microsoft.com/office/drawing/2010/main" xmlns="" val="0"/>
+                <a14:useLocalDpi xmlns:a14="http://schemas.microsoft.com/office/drawing/2010/main" val="0"/>
               </a:ext>
             </a:extLst>
           </a:blip>
@@ -3986,7 +3965,7 @@
           <a:noFill/>
           <a:extLst>
             <a:ext uri="{909E8E84-426E-40DD-AFC4-6F175D3DCCD1}">
-              <a14:hiddenFill xmlns:a14="http://schemas.microsoft.com/office/drawing/2010/main" xmlns="">
+              <a14:hiddenFill xmlns:a14="http://schemas.microsoft.com/office/drawing/2010/main">
                 <a:solidFill>
                   <a:srgbClr val="FFFFFF"/>
                 </a:solidFill>
@@ -3998,7 +3977,7 @@
     </p:spTree>
     <p:extLst>
       <p:ext uri="{BB962C8B-B14F-4D97-AF65-F5344CB8AC3E}">
-        <p14:creationId xmlns:p14="http://schemas.microsoft.com/office/powerpoint/2010/main" xmlns="" val="283935473"/>
+        <p14:creationId xmlns:p14="http://schemas.microsoft.com/office/powerpoint/2010/main" val="283935473"/>
       </p:ext>
     </p:extLst>
   </p:cSld>
@@ -4044,7 +4023,7 @@
             </a:duotone>
             <a:extLst>
               <a:ext uri="{28A0092B-C50C-407E-A947-70E740481C1C}">
-                <a14:useLocalDpi xmlns:a14="http://schemas.microsoft.com/office/drawing/2010/main" xmlns="" val="0"/>
+                <a14:useLocalDpi xmlns:a14="http://schemas.microsoft.com/office/drawing/2010/main" val="0"/>
               </a:ext>
             </a:extLst>
           </a:blip>
@@ -4128,7 +4107,7 @@
           <a:lstStyle/>
           <a:p>
             <a:r>
-              <a:rPr lang="ru-RU" sz="2400" dirty="0" smtClean="0">
+              <a:rPr lang="ru-RU" sz="2400" dirty="0">
                 <a:effectLst/>
                 <a:latin typeface="Times New Roman" panose="02020603050405020304" pitchFamily="18" charset="0"/>
                 <a:ea typeface="Times New Roman" panose="02020603050405020304" pitchFamily="18" charset="0"/>
@@ -4136,7 +4115,7 @@
               <a:t>Цена разработки программного продукта: </a:t>
             </a:r>
             <a:r>
-              <a:rPr lang="ru-RU" sz="2400" b="1" dirty="0" smtClean="0">
+              <a:rPr lang="ru-RU" sz="2400" b="1" dirty="0">
                 <a:effectLst/>
                 <a:latin typeface="Times New Roman" panose="02020603050405020304" pitchFamily="18" charset="0"/>
                 <a:ea typeface="Times New Roman" panose="02020603050405020304" pitchFamily="18" charset="0"/>
@@ -4144,7 +4123,7 @@
               <a:t>25214</a:t>
             </a:r>
             <a:r>
-              <a:rPr lang="ru-RU" sz="2400" dirty="0" smtClean="0">
+              <a:rPr lang="ru-RU" sz="2400" dirty="0">
                 <a:effectLst/>
                 <a:latin typeface="Times New Roman" panose="02020603050405020304" pitchFamily="18" charset="0"/>
                 <a:ea typeface="Times New Roman" panose="02020603050405020304" pitchFamily="18" charset="0"/>
@@ -4198,7 +4177,7 @@
               <a:t>П</a:t>
             </a:r>
             <a:r>
-              <a:rPr lang="ru-RU" sz="2000" dirty="0" smtClean="0">
+              <a:rPr lang="ru-RU" sz="2000" dirty="0">
                 <a:solidFill>
                   <a:srgbClr val="000000"/>
                 </a:solidFill>
@@ -4209,7 +4188,7 @@
               <a:t>рограмма разработана </a:t>
             </a:r>
             <a:r>
-              <a:rPr lang="ru-RU" sz="2000" dirty="0" smtClean="0">
+              <a:rPr lang="ru-RU" sz="2000" dirty="0">
                 <a:effectLst/>
                 <a:latin typeface="Times New Roman" panose="02020603050405020304" pitchFamily="18" charset="0"/>
                 <a:ea typeface="Times New Roman" panose="02020603050405020304" pitchFamily="18" charset="0"/>
@@ -4217,7 +4196,7 @@
               <a:t>в рамках учебного процесса</a:t>
             </a:r>
             <a:r>
-              <a:rPr lang="ru-RU" sz="2000" dirty="0" smtClean="0">
+              <a:rPr lang="ru-RU" sz="2000" dirty="0">
                 <a:solidFill>
                   <a:srgbClr val="000000"/>
                 </a:solidFill>
@@ -4228,18 +4207,13 @@
               <a:t> для конкретного заказчика и </a:t>
             </a:r>
             <a:r>
-              <a:rPr lang="ru-RU" sz="2000" dirty="0" smtClean="0">
+              <a:rPr lang="ru-RU" sz="2000" dirty="0">
                 <a:effectLst/>
                 <a:latin typeface="Times New Roman" panose="02020603050405020304" pitchFamily="18" charset="0"/>
                 <a:ea typeface="Times New Roman" panose="02020603050405020304" pitchFamily="18" charset="0"/>
               </a:rPr>
               <a:t>будет реализована бесплатно.</a:t>
             </a:r>
-            <a:endParaRPr lang="ru-RU" sz="2000" dirty="0">
-              <a:effectLst/>
-              <a:latin typeface="Times New Roman" panose="02020603050405020304" pitchFamily="18" charset="0"/>
-              <a:ea typeface="Times New Roman" panose="02020603050405020304" pitchFamily="18" charset="0"/>
-            </a:endParaRPr>
           </a:p>
         </p:txBody>
       </p:sp>
@@ -4274,21 +4248,7 @@
                 <a:latin typeface="Times New Roman" panose="02020603050405020304" pitchFamily="18" charset="0"/>
                 <a:ea typeface="Times New Roman" panose="02020603050405020304" pitchFamily="18" charset="0"/>
               </a:rPr>
-              <a:t>Было принято решение продвигать продукт путем выпуска пробной версии продукта и размещение ее на специализированном бесплатном </a:t>
-            </a:r>
-            <a:r>
-              <a:rPr lang="ru-RU" sz="2000" dirty="0" smtClean="0">
-                <a:latin typeface="Times New Roman" panose="02020603050405020304" pitchFamily="18" charset="0"/>
-                <a:ea typeface="Times New Roman" panose="02020603050405020304" pitchFamily="18" charset="0"/>
-              </a:rPr>
-              <a:t>хостинге. Данный </a:t>
-            </a:r>
-            <a:r>
-              <a:rPr lang="ru-RU" sz="2000" dirty="0">
-                <a:latin typeface="Times New Roman" panose="02020603050405020304" pitchFamily="18" charset="0"/>
-                <a:ea typeface="Times New Roman" panose="02020603050405020304" pitchFamily="18" charset="0"/>
-              </a:rPr>
-              <a:t>вариант позволит пользователям ознакомится с программным продуктом, оценить функционал, а размещение на специализированном хостинге привлечет большое количество клиентов.</a:t>
+              <a:t>Было принято решение продвигать продукт путем выпуска пробной версии продукта и размещение ее на специализированном бесплатном хостинге. Данный вариант позволит пользователям ознакомится с программным продуктом, оценить функционал, а размещение на специализированном хостинге привлечет большое количество клиентов.</a:t>
             </a:r>
           </a:p>
         </p:txBody>
@@ -4323,18 +4283,13 @@
               </a:spcAft>
             </a:pPr>
             <a:r>
-              <a:rPr lang="ru-RU" sz="2000" dirty="0" smtClean="0">
+              <a:rPr lang="ru-RU" sz="2000" dirty="0">
                 <a:effectLst/>
                 <a:latin typeface="Times New Roman" panose="02020603050405020304" pitchFamily="18" charset="0"/>
                 <a:ea typeface="Times New Roman" panose="02020603050405020304" pitchFamily="18" charset="0"/>
               </a:rPr>
               <a:t>Планируется реализовать программный продукт для желающих по цене 2500 рублей. Таким образом срок окупаемости программного продукта, составит 1 год.</a:t>
             </a:r>
-            <a:endParaRPr lang="ru-RU" sz="2000" dirty="0">
-              <a:effectLst/>
-              <a:latin typeface="Times New Roman" panose="02020603050405020304" pitchFamily="18" charset="0"/>
-              <a:ea typeface="Times New Roman" panose="02020603050405020304" pitchFamily="18" charset="0"/>
-            </a:endParaRPr>
           </a:p>
         </p:txBody>
       </p:sp>
@@ -4361,18 +4316,13 @@
           <a:lstStyle/>
           <a:p>
             <a:r>
-              <a:rPr lang="ru-RU" b="1" dirty="0" smtClean="0">
+              <a:rPr lang="ru-RU" b="1" dirty="0">
                 <a:solidFill>
                   <a:srgbClr val="FF0000"/>
                 </a:solidFill>
               </a:rPr>
               <a:t>На данном слайде нужно сравнить с аналогами, сделать вывод по преимуществам вашей программу, озвучить стоимость разработки и срок окупаемости программы</a:t>
             </a:r>
-            <a:endParaRPr lang="ru-RU" b="1" dirty="0">
-              <a:solidFill>
-                <a:srgbClr val="FF0000"/>
-              </a:solidFill>
-            </a:endParaRPr>
           </a:p>
         </p:txBody>
       </p:sp>
@@ -4399,38 +4349,26 @@
           <a:lstStyle/>
           <a:p>
             <a:r>
-              <a:rPr lang="ru-RU" sz="8000" dirty="0" smtClean="0">
+              <a:rPr lang="ru-RU" sz="8000" dirty="0">
                 <a:solidFill>
                   <a:srgbClr val="FF0000"/>
                 </a:solidFill>
               </a:rPr>
               <a:t>?</a:t>
             </a:r>
-            <a:endParaRPr lang="ru-RU" sz="8000" dirty="0">
-              <a:solidFill>
-                <a:srgbClr val="FF0000"/>
-              </a:solidFill>
-            </a:endParaRPr>
           </a:p>
         </p:txBody>
       </p:sp>
     </p:spTree>
     <p:extLst>
       <p:ext uri="{BB962C8B-B14F-4D97-AF65-F5344CB8AC3E}">
-        <p14:creationId xmlns:p14="http://schemas.microsoft.com/office/powerpoint/2010/main" xmlns="" val="216404313"/>
+        <p14:creationId xmlns:p14="http://schemas.microsoft.com/office/powerpoint/2010/main" val="216404313"/>
       </p:ext>
     </p:extLst>
   </p:cSld>
   <p:clrMapOvr>
     <a:masterClrMapping/>
   </p:clrMapOvr>
-  <p:timing>
-    <p:tnLst>
-      <p:par>
-        <p:cTn id="1" dur="indefinite" restart="never" nodeType="tmRoot"/>
-      </p:par>
-    </p:tnLst>
-  </p:timing>
 </p:sld>
 </file>
 
@@ -4470,7 +4408,7 @@
             </a:duotone>
             <a:extLst>
               <a:ext uri="{28A0092B-C50C-407E-A947-70E740481C1C}">
-                <a14:useLocalDpi xmlns:a14="http://schemas.microsoft.com/office/drawing/2010/main" xmlns="" val="0"/>
+                <a14:useLocalDpi xmlns:a14="http://schemas.microsoft.com/office/drawing/2010/main" val="0"/>
               </a:ext>
             </a:extLst>
           </a:blip>
@@ -4562,7 +4500,7 @@
               </a:spcAft>
             </a:pPr>
             <a:r>
-              <a:rPr lang="ru-RU" sz="2000" dirty="0" smtClean="0">
+              <a:rPr lang="ru-RU" sz="2000" dirty="0">
                 <a:effectLst/>
                 <a:latin typeface="Times New Roman" panose="02020603050405020304" pitchFamily="18" charset="0"/>
                 <a:ea typeface="Times New Roman" panose="02020603050405020304" pitchFamily="18" charset="0"/>
@@ -4580,7 +4518,7 @@
               </a:spcAft>
             </a:pPr>
             <a:r>
-              <a:rPr lang="ru-RU" sz="2000" dirty="0" smtClean="0">
+              <a:rPr lang="ru-RU" sz="2000" dirty="0">
                 <a:effectLst/>
                 <a:latin typeface="Times New Roman" panose="02020603050405020304" pitchFamily="18" charset="0"/>
                 <a:ea typeface="Times New Roman" panose="02020603050405020304" pitchFamily="18" charset="0"/>
@@ -4598,38 +4536,26 @@
               </a:spcAft>
             </a:pPr>
             <a:r>
-              <a:rPr lang="ru-RU" sz="2000" dirty="0" smtClean="0">
+              <a:rPr lang="ru-RU" sz="2000" dirty="0">
                 <a:effectLst/>
                 <a:latin typeface="Times New Roman" panose="02020603050405020304" pitchFamily="18" charset="0"/>
                 <a:ea typeface="Times New Roman" panose="02020603050405020304" pitchFamily="18" charset="0"/>
               </a:rPr>
               <a:t>Перспективы развития программы заключаются в усовершенствовании её функций, например: возможность добавления в базу данных документов и возможность представления программы в универсальном виде.</a:t>
             </a:r>
-            <a:endParaRPr lang="ru-RU" sz="2000" dirty="0">
-              <a:effectLst/>
-              <a:latin typeface="Times New Roman" panose="02020603050405020304" pitchFamily="18" charset="0"/>
-              <a:ea typeface="Times New Roman" panose="02020603050405020304" pitchFamily="18" charset="0"/>
-            </a:endParaRPr>
           </a:p>
         </p:txBody>
       </p:sp>
     </p:spTree>
     <p:extLst>
       <p:ext uri="{BB962C8B-B14F-4D97-AF65-F5344CB8AC3E}">
-        <p14:creationId xmlns:p14="http://schemas.microsoft.com/office/powerpoint/2010/main" xmlns="" val="3161737763"/>
+        <p14:creationId xmlns:p14="http://schemas.microsoft.com/office/powerpoint/2010/main" val="3161737763"/>
       </p:ext>
     </p:extLst>
   </p:cSld>
   <p:clrMapOvr>
     <a:masterClrMapping/>
   </p:clrMapOvr>
-  <p:timing>
-    <p:tnLst>
-      <p:par>
-        <p:cTn id="1" dur="indefinite" restart="never" nodeType="tmRoot"/>
-      </p:par>
-    </p:tnLst>
-  </p:timing>
 </p:sld>
 </file>
 
@@ -4662,7 +4588,7 @@
           <a:blip r:embed="rId2" cstate="print">
             <a:extLst>
               <a:ext uri="{28A0092B-C50C-407E-A947-70E740481C1C}">
-                <a14:useLocalDpi xmlns:a14="http://schemas.microsoft.com/office/drawing/2010/main" xmlns="" val="0"/>
+                <a14:useLocalDpi xmlns:a14="http://schemas.microsoft.com/office/drawing/2010/main" val="0"/>
               </a:ext>
             </a:extLst>
           </a:blip>
@@ -4680,7 +4606,7 @@
           <a:noFill/>
           <a:extLst>
             <a:ext uri="{909E8E84-426E-40DD-AFC4-6F175D3DCCD1}">
-              <a14:hiddenFill xmlns:a14="http://schemas.microsoft.com/office/drawing/2010/main" xmlns="">
+              <a14:hiddenFill xmlns:a14="http://schemas.microsoft.com/office/drawing/2010/main">
                 <a:solidFill>
                   <a:srgbClr val="FFFFFF"/>
                 </a:solidFill>
@@ -4707,7 +4633,7 @@
           <a:lstStyle/>
           <a:p>
             <a:r>
-              <a:rPr lang="ru-RU" dirty="0" smtClean="0">
+              <a:rPr lang="ru-RU" dirty="0">
                 <a:solidFill>
                   <a:schemeClr val="bg1">
                     <a:lumMod val="95000"/>
@@ -4716,13 +4642,6 @@
               </a:rPr>
               <a:t>ВЫПУСКНАЯ КВАЛИФИКАЦИОННАЯ РАБОТА</a:t>
             </a:r>
-            <a:endParaRPr lang="ru-RU" dirty="0">
-              <a:solidFill>
-                <a:schemeClr val="bg1">
-                  <a:lumMod val="95000"/>
-                </a:schemeClr>
-              </a:solidFill>
-            </a:endParaRPr>
           </a:p>
         </p:txBody>
       </p:sp>
@@ -4749,7 +4668,7 @@
           <a:lstStyle/>
           <a:p>
             <a:r>
-              <a:rPr lang="ru-RU" sz="2800" b="1" dirty="0" smtClean="0">
+              <a:rPr lang="ru-RU" sz="2800" b="1" dirty="0">
                 <a:solidFill>
                   <a:schemeClr val="tx2">
                     <a:lumMod val="75000"/>
@@ -4759,7 +4678,7 @@
               <a:t>Тема</a:t>
             </a:r>
             <a:r>
-              <a:rPr lang="en-US" sz="2800" b="1" dirty="0" smtClean="0">
+              <a:rPr lang="en-US" sz="2800" b="1" dirty="0">
                 <a:solidFill>
                   <a:schemeClr val="tx2">
                     <a:lumMod val="75000"/>
@@ -4808,7 +4727,7 @@
               </a:spcAft>
             </a:pPr>
             <a:r>
-              <a:rPr lang="ru-RU" dirty="0" smtClean="0">
+              <a:rPr lang="ru-RU" dirty="0">
                 <a:solidFill>
                   <a:srgbClr val="000000"/>
                 </a:solidFill>
@@ -4819,7 +4738,7 @@
               <a:t>Министерство образования, науки и молодежной политики</a:t>
             </a:r>
             <a:br>
-              <a:rPr lang="ru-RU" dirty="0" smtClean="0">
+              <a:rPr lang="ru-RU" dirty="0">
                 <a:solidFill>
                   <a:srgbClr val="000000"/>
                 </a:solidFill>
@@ -4829,7 +4748,7 @@
               </a:rPr>
             </a:br>
             <a:r>
-              <a:rPr lang="ru-RU" dirty="0" smtClean="0">
+              <a:rPr lang="ru-RU" dirty="0">
                 <a:solidFill>
                   <a:srgbClr val="000000"/>
                 </a:solidFill>
@@ -4839,7 +4758,7 @@
               </a:rPr>
               <a:t> Нижегородской области</a:t>
             </a:r>
-            <a:endParaRPr lang="ru-RU" sz="1600" dirty="0" smtClean="0">
+            <a:endParaRPr lang="ru-RU" sz="1600" dirty="0">
               <a:effectLst/>
               <a:latin typeface="Times New Roman" panose="02020603050405020304" pitchFamily="18" charset="0"/>
               <a:ea typeface="Times New Roman" panose="02020603050405020304" pitchFamily="18" charset="0"/>
@@ -4852,7 +4771,7 @@
               </a:spcAft>
             </a:pPr>
             <a:r>
-              <a:rPr lang="ru-RU" dirty="0" smtClean="0">
+              <a:rPr lang="ru-RU" dirty="0">
                 <a:solidFill>
                   <a:srgbClr val="000000"/>
                 </a:solidFill>
@@ -4863,7 +4782,7 @@
               <a:t>Государственное бюджетное профессиональное </a:t>
             </a:r>
             <a:br>
-              <a:rPr lang="ru-RU" dirty="0" smtClean="0">
+              <a:rPr lang="ru-RU" dirty="0">
                 <a:solidFill>
                   <a:srgbClr val="000000"/>
                 </a:solidFill>
@@ -4873,7 +4792,7 @@
               </a:rPr>
             </a:br>
             <a:r>
-              <a:rPr lang="ru-RU" dirty="0" smtClean="0">
+              <a:rPr lang="ru-RU" dirty="0">
                 <a:solidFill>
                   <a:srgbClr val="000000"/>
                 </a:solidFill>
@@ -4883,7 +4802,7 @@
               </a:rPr>
               <a:t>образовательное учреждение</a:t>
             </a:r>
-            <a:endParaRPr lang="ru-RU" sz="1600" dirty="0" smtClean="0">
+            <a:endParaRPr lang="ru-RU" sz="1600" dirty="0">
               <a:effectLst/>
               <a:latin typeface="Times New Roman" panose="02020603050405020304" pitchFamily="18" charset="0"/>
               <a:ea typeface="Times New Roman" panose="02020603050405020304" pitchFamily="18" charset="0"/>
@@ -4896,7 +4815,7 @@
               </a:spcAft>
             </a:pPr>
             <a:r>
-              <a:rPr lang="ru-RU" dirty="0" smtClean="0">
+              <a:rPr lang="ru-RU" dirty="0">
                 <a:solidFill>
                   <a:srgbClr val="000000"/>
                 </a:solidFill>
@@ -4906,7 +4825,7 @@
               </a:rPr>
               <a:t> «Заволжский автомоторный техникум»</a:t>
             </a:r>
-            <a:endParaRPr lang="ru-RU" sz="1600" dirty="0" smtClean="0">
+            <a:endParaRPr lang="ru-RU" sz="1600" dirty="0">
               <a:effectLst/>
               <a:latin typeface="Times New Roman" panose="02020603050405020304" pitchFamily="18" charset="0"/>
               <a:ea typeface="Times New Roman" panose="02020603050405020304" pitchFamily="18" charset="0"/>
@@ -4919,7 +4838,7 @@
               </a:spcAft>
             </a:pPr>
             <a:r>
-              <a:rPr lang="ru-RU" dirty="0" smtClean="0">
+              <a:rPr lang="ru-RU" dirty="0">
                 <a:solidFill>
                   <a:srgbClr val="000000"/>
                 </a:solidFill>
@@ -4964,7 +4883,7 @@
               </a:spcAft>
             </a:pPr>
             <a:r>
-              <a:rPr lang="ru-RU" sz="2000" dirty="0" smtClean="0">
+              <a:rPr lang="ru-RU" sz="2000" dirty="0">
                 <a:solidFill>
                   <a:srgbClr val="000000"/>
                 </a:solidFill>
@@ -5008,7 +4927,7 @@
               </a:spcAft>
             </a:pPr>
             <a:r>
-              <a:rPr lang="ru-RU" sz="2000" dirty="0" smtClean="0">
+              <a:rPr lang="ru-RU" sz="2000" dirty="0">
                 <a:solidFill>
                   <a:srgbClr val="000000"/>
                 </a:solidFill>
@@ -5052,7 +4971,7 @@
               </a:spcAft>
             </a:pPr>
             <a:r>
-              <a:rPr lang="ru-RU" sz="2000" dirty="0" smtClean="0">
+              <a:rPr lang="ru-RU" sz="2000" dirty="0">
                 <a:solidFill>
                   <a:srgbClr val="000000"/>
                 </a:solidFill>
@@ -5069,7 +4988,7 @@
               </a:spcAft>
             </a:pPr>
             <a:r>
-              <a:rPr lang="ru-RU" sz="2000" dirty="0" smtClean="0">
+              <a:rPr lang="ru-RU" sz="2000" dirty="0">
                 <a:solidFill>
                   <a:srgbClr val="000000"/>
                 </a:solidFill>
@@ -5099,7 +5018,7 @@
           <a:blip r:embed="rId3" cstate="print">
             <a:extLst>
               <a:ext uri="{28A0092B-C50C-407E-A947-70E740481C1C}">
-                <a14:useLocalDpi xmlns:a14="http://schemas.microsoft.com/office/drawing/2010/main" xmlns="" val="0"/>
+                <a14:useLocalDpi xmlns:a14="http://schemas.microsoft.com/office/drawing/2010/main" val="0"/>
               </a:ext>
             </a:extLst>
           </a:blip>
@@ -5117,7 +5036,7 @@
           <a:noFill/>
           <a:extLst>
             <a:ext uri="{909E8E84-426E-40DD-AFC4-6F175D3DCCD1}">
-              <a14:hiddenFill xmlns:a14="http://schemas.microsoft.com/office/drawing/2010/main" xmlns="">
+              <a14:hiddenFill xmlns:a14="http://schemas.microsoft.com/office/drawing/2010/main">
                 <a:solidFill>
                   <a:srgbClr val="FFFFFF"/>
                 </a:solidFill>
@@ -5129,7 +5048,7 @@
     </p:spTree>
     <p:extLst>
       <p:ext uri="{BB962C8B-B14F-4D97-AF65-F5344CB8AC3E}">
-        <p14:creationId xmlns:p14="http://schemas.microsoft.com/office/powerpoint/2010/main" xmlns="" val="771684513"/>
+        <p14:creationId xmlns:p14="http://schemas.microsoft.com/office/powerpoint/2010/main" val="771684513"/>
       </p:ext>
     </p:extLst>
   </p:cSld>
@@ -5183,7 +5102,7 @@
             </a:duotone>
             <a:extLst>
               <a:ext uri="{28A0092B-C50C-407E-A947-70E740481C1C}">
-                <a14:useLocalDpi xmlns:a14="http://schemas.microsoft.com/office/drawing/2010/main" xmlns="" val="0"/>
+                <a14:useLocalDpi xmlns:a14="http://schemas.microsoft.com/office/drawing/2010/main" val="0"/>
               </a:ext>
             </a:extLst>
           </a:blip>
@@ -5229,7 +5148,7 @@
           <a:lstStyle/>
           <a:p>
             <a:r>
-              <a:rPr lang="ru-RU" sz="3600" i="0" dirty="0" smtClean="0">
+              <a:rPr lang="ru-RU" sz="3600" i="0" dirty="0">
                 <a:solidFill>
                   <a:schemeClr val="bg1"/>
                 </a:solidFill>
@@ -5277,7 +5196,7 @@
               </a:spcAft>
             </a:pPr>
             <a:r>
-              <a:rPr lang="ru-RU" sz="2000" dirty="0" smtClean="0">
+              <a:rPr lang="ru-RU" sz="2000" dirty="0">
                 <a:solidFill>
                   <a:srgbClr val="000000"/>
                 </a:solidFill>
@@ -5287,7 +5206,7 @@
               </a:rPr>
               <a:t>Музей - учреждение, занимающееся собиранием, изучением, хранением предметов - памятников истории, материальной и духовной культуры. </a:t>
             </a:r>
-            <a:endParaRPr lang="ru-RU" sz="2000" dirty="0" smtClean="0">
+            <a:endParaRPr lang="ru-RU" sz="2000" dirty="0">
               <a:effectLst/>
               <a:latin typeface="Times New Roman" panose="02020603050405020304" pitchFamily="18" charset="0"/>
               <a:ea typeface="Times New Roman" panose="02020603050405020304" pitchFamily="18" charset="0"/>
@@ -5303,7 +5222,7 @@
               </a:spcAft>
             </a:pPr>
             <a:r>
-              <a:rPr lang="ru-RU" sz="2000" dirty="0" smtClean="0">
+              <a:rPr lang="ru-RU" sz="2000" dirty="0">
                 <a:solidFill>
                   <a:srgbClr val="000000"/>
                 </a:solidFill>
@@ -5324,7 +5243,7 @@
     </p:spTree>
     <p:extLst>
       <p:ext uri="{BB962C8B-B14F-4D97-AF65-F5344CB8AC3E}">
-        <p14:creationId xmlns:p14="http://schemas.microsoft.com/office/powerpoint/2010/main" xmlns="" val="3403353562"/>
+        <p14:creationId xmlns:p14="http://schemas.microsoft.com/office/powerpoint/2010/main" val="3403353562"/>
       </p:ext>
     </p:extLst>
   </p:cSld>
@@ -5370,7 +5289,7 @@
             </a:duotone>
             <a:extLst>
               <a:ext uri="{28A0092B-C50C-407E-A947-70E740481C1C}">
-                <a14:useLocalDpi xmlns:a14="http://schemas.microsoft.com/office/drawing/2010/main" xmlns="" val="0"/>
+                <a14:useLocalDpi xmlns:a14="http://schemas.microsoft.com/office/drawing/2010/main" val="0"/>
               </a:ext>
             </a:extLst>
           </a:blip>
@@ -5473,18 +5392,11 @@
               </a:lnSpc>
             </a:pPr>
             <a:r>
-              <a:rPr lang="ru-RU" sz="2000" dirty="0" smtClean="0">
-                <a:latin typeface="Times New Roman" panose="02020603050405020304" pitchFamily="18" charset="0"/>
-                <a:cs typeface="Times New Roman" panose="02020603050405020304" pitchFamily="18" charset="0"/>
-              </a:rPr>
-              <a:t>- </a:t>
-            </a:r>
-            <a:r>
               <a:rPr lang="ru-RU" sz="2000" dirty="0">
                 <a:latin typeface="Times New Roman" panose="02020603050405020304" pitchFamily="18" charset="0"/>
                 <a:cs typeface="Times New Roman" panose="02020603050405020304" pitchFamily="18" charset="0"/>
               </a:rPr>
-              <a:t>иметь продуманный интерфейс в соответствии с поставленной задачей; </a:t>
+              <a:t>- иметь продуманный интерфейс в соответствии с поставленной задачей; </a:t>
             </a:r>
           </a:p>
           <a:p>
@@ -5522,18 +5434,11 @@
               </a:lnSpc>
             </a:pPr>
             <a:r>
-              <a:rPr lang="ru-RU" sz="2000" dirty="0" smtClean="0">
-                <a:latin typeface="Times New Roman" panose="02020603050405020304" pitchFamily="18" charset="0"/>
-                <a:cs typeface="Times New Roman" panose="02020603050405020304" pitchFamily="18" charset="0"/>
-              </a:rPr>
-              <a:t>-иметь </a:t>
-            </a:r>
-            <a:r>
               <a:rPr lang="ru-RU" sz="2000" dirty="0">
                 <a:latin typeface="Times New Roman" panose="02020603050405020304" pitchFamily="18" charset="0"/>
                 <a:cs typeface="Times New Roman" panose="02020603050405020304" pitchFamily="18" charset="0"/>
               </a:rPr>
-              <a:t>возможность ведения и редактирования базы данных (добавление, удаление, редактирование, сохранение);</a:t>
+              <a:t>-иметь возможность ведения и редактирования базы данных (добавление, удаление, редактирование, сохранение);</a:t>
             </a:r>
           </a:p>
           <a:p>
@@ -5653,20 +5558,13 @@
     </p:spTree>
     <p:extLst>
       <p:ext uri="{BB962C8B-B14F-4D97-AF65-F5344CB8AC3E}">
-        <p14:creationId xmlns:p14="http://schemas.microsoft.com/office/powerpoint/2010/main" xmlns="" val="1302634897"/>
+        <p14:creationId xmlns:p14="http://schemas.microsoft.com/office/powerpoint/2010/main" val="1302634897"/>
       </p:ext>
     </p:extLst>
   </p:cSld>
   <p:clrMapOvr>
     <a:masterClrMapping/>
   </p:clrMapOvr>
-  <p:timing>
-    <p:tnLst>
-      <p:par>
-        <p:cTn id="1" dur="indefinite" restart="never" nodeType="tmRoot"/>
-      </p:par>
-    </p:tnLst>
-  </p:timing>
 </p:sld>
 </file>
 
@@ -5901,7 +5799,7 @@
             </a:duotone>
             <a:extLst>
               <a:ext uri="{28A0092B-C50C-407E-A947-70E740481C1C}">
-                <a14:useLocalDpi xmlns:a14="http://schemas.microsoft.com/office/drawing/2010/main" xmlns="" val="0"/>
+                <a14:useLocalDpi xmlns:a14="http://schemas.microsoft.com/office/drawing/2010/main" val="0"/>
               </a:ext>
             </a:extLst>
           </a:blip>
@@ -5969,7 +5867,7 @@
           <a:blip r:embed="rId3" cstate="print">
             <a:extLst>
               <a:ext uri="{28A0092B-C50C-407E-A947-70E740481C1C}">
-                <a14:useLocalDpi xmlns:a14="http://schemas.microsoft.com/office/drawing/2010/main" xmlns="" val="0"/>
+                <a14:useLocalDpi xmlns:a14="http://schemas.microsoft.com/office/drawing/2010/main" val="0"/>
               </a:ext>
             </a:extLst>
           </a:blip>
@@ -5989,7 +5887,7 @@
           <a:noFill/>
           <a:extLst>
             <a:ext uri="{909E8E84-426E-40DD-AFC4-6F175D3DCCD1}">
-              <a14:hiddenFill xmlns:a14="http://schemas.microsoft.com/office/drawing/2010/main" xmlns="">
+              <a14:hiddenFill xmlns:a14="http://schemas.microsoft.com/office/drawing/2010/main">
                 <a:solidFill>
                   <a:srgbClr val="FFFFFF"/>
                 </a:solidFill>
@@ -6082,7 +5980,7 @@
           <a:blip r:embed="rId7" cstate="print">
             <a:extLst>
               <a:ext uri="{28A0092B-C50C-407E-A947-70E740481C1C}">
-                <a14:useLocalDpi xmlns:a14="http://schemas.microsoft.com/office/drawing/2010/main" xmlns="" val="0"/>
+                <a14:useLocalDpi xmlns:a14="http://schemas.microsoft.com/office/drawing/2010/main" val="0"/>
               </a:ext>
             </a:extLst>
           </a:blip>
@@ -6100,7 +5998,7 @@
           <a:noFill/>
           <a:extLst>
             <a:ext uri="{909E8E84-426E-40DD-AFC4-6F175D3DCCD1}">
-              <a14:hiddenFill xmlns:a14="http://schemas.microsoft.com/office/drawing/2010/main" xmlns="">
+              <a14:hiddenFill xmlns:a14="http://schemas.microsoft.com/office/drawing/2010/main">
                 <a:solidFill>
                   <a:srgbClr val="FFFFFF"/>
                 </a:solidFill>
@@ -6121,7 +6019,7 @@
           <a:blip r:embed="rId8" cstate="print">
             <a:extLst>
               <a:ext uri="{28A0092B-C50C-407E-A947-70E740481C1C}">
-                <a14:useLocalDpi xmlns:a14="http://schemas.microsoft.com/office/drawing/2010/main" xmlns="" val="0"/>
+                <a14:useLocalDpi xmlns:a14="http://schemas.microsoft.com/office/drawing/2010/main" val="0"/>
               </a:ext>
             </a:extLst>
           </a:blip>
@@ -6139,7 +6037,7 @@
           <a:noFill/>
           <a:extLst>
             <a:ext uri="{909E8E84-426E-40DD-AFC4-6F175D3DCCD1}">
-              <a14:hiddenFill xmlns:a14="http://schemas.microsoft.com/office/drawing/2010/main" xmlns="">
+              <a14:hiddenFill xmlns:a14="http://schemas.microsoft.com/office/drawing/2010/main">
                 <a:solidFill>
                   <a:srgbClr val="FFFFFF"/>
                 </a:solidFill>
@@ -6161,7 +6059,7 @@
           <a:blip r:embed="rId9" cstate="print">
             <a:extLst>
               <a:ext uri="{28A0092B-C50C-407E-A947-70E740481C1C}">
-                <a14:useLocalDpi xmlns:a14="http://schemas.microsoft.com/office/drawing/2010/main" xmlns="" val="0"/>
+                <a14:useLocalDpi xmlns:a14="http://schemas.microsoft.com/office/drawing/2010/main" val="0"/>
               </a:ext>
             </a:extLst>
           </a:blip>
@@ -6181,7 +6079,7 @@
           <a:noFill/>
           <a:extLst>
             <a:ext uri="{909E8E84-426E-40DD-AFC4-6F175D3DCCD1}">
-              <a14:hiddenFill xmlns:a14="http://schemas.microsoft.com/office/drawing/2010/main" xmlns="">
+              <a14:hiddenFill xmlns:a14="http://schemas.microsoft.com/office/drawing/2010/main">
                 <a:solidFill>
                   <a:srgbClr val="FFFFFF"/>
                 </a:solidFill>
@@ -6202,7 +6100,7 @@
           <a:blip r:embed="rId10" cstate="print">
             <a:extLst>
               <a:ext uri="{28A0092B-C50C-407E-A947-70E740481C1C}">
-                <a14:useLocalDpi xmlns:a14="http://schemas.microsoft.com/office/drawing/2010/main" xmlns="" val="0"/>
+                <a14:useLocalDpi xmlns:a14="http://schemas.microsoft.com/office/drawing/2010/main" val="0"/>
               </a:ext>
             </a:extLst>
           </a:blip>
@@ -6222,7 +6120,7 @@
           <a:noFill/>
           <a:extLst>
             <a:ext uri="{909E8E84-426E-40DD-AFC4-6F175D3DCCD1}">
-              <a14:hiddenFill xmlns:a14="http://schemas.microsoft.com/office/drawing/2010/main" xmlns="">
+              <a14:hiddenFill xmlns:a14="http://schemas.microsoft.com/office/drawing/2010/main">
                 <a:solidFill>
                   <a:srgbClr val="FFFFFF"/>
                 </a:solidFill>
@@ -6250,7 +6148,7 @@
           <a:noFill/>
           <a:extLst>
             <a:ext uri="{909E8E84-426E-40DD-AFC4-6F175D3DCCD1}">
-              <a14:hiddenFill xmlns:a14="http://schemas.microsoft.com/office/drawing/2010/main" xmlns="">
+              <a14:hiddenFill xmlns:a14="http://schemas.microsoft.com/office/drawing/2010/main">
                 <a:solidFill>
                   <a:srgbClr val="FFFFFF"/>
                 </a:solidFill>
@@ -6283,7 +6181,7 @@
           <a:blip r:embed="rId11" cstate="print">
             <a:extLst>
               <a:ext uri="{28A0092B-C50C-407E-A947-70E740481C1C}">
-                <a14:useLocalDpi xmlns:a14="http://schemas.microsoft.com/office/drawing/2010/main" xmlns="" val="0"/>
+                <a14:useLocalDpi xmlns:a14="http://schemas.microsoft.com/office/drawing/2010/main" val="0"/>
               </a:ext>
             </a:extLst>
           </a:blip>
@@ -6306,7 +6204,7 @@
           </a:effectLst>
           <a:extLst>
             <a:ext uri="{909E8E84-426E-40DD-AFC4-6F175D3DCCD1}">
-              <a14:hiddenFill xmlns:a14="http://schemas.microsoft.com/office/drawing/2010/main" xmlns="">
+              <a14:hiddenFill xmlns:a14="http://schemas.microsoft.com/office/drawing/2010/main">
                 <a:solidFill>
                   <a:srgbClr val="FFFFFF"/>
                 </a:solidFill>
@@ -6334,7 +6232,7 @@
           <a:noFill/>
           <a:extLst>
             <a:ext uri="{909E8E84-426E-40DD-AFC4-6F175D3DCCD1}">
-              <a14:hiddenFill xmlns:a14="http://schemas.microsoft.com/office/drawing/2010/main" xmlns="">
+              <a14:hiddenFill xmlns:a14="http://schemas.microsoft.com/office/drawing/2010/main">
                 <a:solidFill>
                   <a:srgbClr val="FFFFFF"/>
                 </a:solidFill>
@@ -6373,7 +6271,7 @@
           <a:noFill/>
           <a:extLst>
             <a:ext uri="{909E8E84-426E-40DD-AFC4-6F175D3DCCD1}">
-              <a14:hiddenFill xmlns:a14="http://schemas.microsoft.com/office/drawing/2010/main" xmlns="">
+              <a14:hiddenFill xmlns:a14="http://schemas.microsoft.com/office/drawing/2010/main">
                 <a:solidFill>
                   <a:srgbClr val="FFFFFF"/>
                 </a:solidFill>
@@ -6406,7 +6304,7 @@
           <a:blip r:embed="rId12" cstate="print">
             <a:extLst>
               <a:ext uri="{28A0092B-C50C-407E-A947-70E740481C1C}">
-                <a14:useLocalDpi xmlns:a14="http://schemas.microsoft.com/office/drawing/2010/main" xmlns="" val="0"/>
+                <a14:useLocalDpi xmlns:a14="http://schemas.microsoft.com/office/drawing/2010/main" val="0"/>
               </a:ext>
             </a:extLst>
           </a:blip>
@@ -6431,7 +6329,7 @@
           </a:ln>
           <a:extLst>
             <a:ext uri="{909E8E84-426E-40DD-AFC4-6F175D3DCCD1}">
-              <a14:hiddenFill xmlns:a14="http://schemas.microsoft.com/office/drawing/2010/main" xmlns="">
+              <a14:hiddenFill xmlns:a14="http://schemas.microsoft.com/office/drawing/2010/main">
                 <a:solidFill>
                   <a:srgbClr val="FFFFFF"/>
                 </a:solidFill>
@@ -6452,7 +6350,7 @@
           <a:blip r:embed="rId13" cstate="print">
             <a:extLst>
               <a:ext uri="{28A0092B-C50C-407E-A947-70E740481C1C}">
-                <a14:useLocalDpi xmlns:a14="http://schemas.microsoft.com/office/drawing/2010/main" xmlns="" val="0"/>
+                <a14:useLocalDpi xmlns:a14="http://schemas.microsoft.com/office/drawing/2010/main" val="0"/>
               </a:ext>
             </a:extLst>
           </a:blip>
@@ -6475,7 +6373,7 @@
           </a:ln>
           <a:extLst>
             <a:ext uri="{909E8E84-426E-40DD-AFC4-6F175D3DCCD1}">
-              <a14:hiddenFill xmlns:a14="http://schemas.microsoft.com/office/drawing/2010/main" xmlns="">
+              <a14:hiddenFill xmlns:a14="http://schemas.microsoft.com/office/drawing/2010/main">
                 <a:solidFill>
                   <a:srgbClr val="FFFFFF"/>
                 </a:solidFill>
@@ -6496,7 +6394,7 @@
           <a:blip r:embed="rId14" cstate="print">
             <a:extLst>
               <a:ext uri="{28A0092B-C50C-407E-A947-70E740481C1C}">
-                <a14:useLocalDpi xmlns:a14="http://schemas.microsoft.com/office/drawing/2010/main" xmlns="" val="0"/>
+                <a14:useLocalDpi xmlns:a14="http://schemas.microsoft.com/office/drawing/2010/main" val="0"/>
               </a:ext>
             </a:extLst>
           </a:blip>
@@ -6516,7 +6414,7 @@
           <a:noFill/>
           <a:extLst>
             <a:ext uri="{909E8E84-426E-40DD-AFC4-6F175D3DCCD1}">
-              <a14:hiddenFill xmlns:a14="http://schemas.microsoft.com/office/drawing/2010/main" xmlns="">
+              <a14:hiddenFill xmlns:a14="http://schemas.microsoft.com/office/drawing/2010/main">
                 <a:solidFill>
                   <a:srgbClr val="FFFFFF"/>
                 </a:solidFill>
@@ -6528,20 +6426,13 @@
     </p:spTree>
     <p:extLst>
       <p:ext uri="{BB962C8B-B14F-4D97-AF65-F5344CB8AC3E}">
-        <p14:creationId xmlns:p14="http://schemas.microsoft.com/office/powerpoint/2010/main" xmlns="" val="3432611689"/>
+        <p14:creationId xmlns:p14="http://schemas.microsoft.com/office/powerpoint/2010/main" val="3432611689"/>
       </p:ext>
     </p:extLst>
   </p:cSld>
   <p:clrMapOvr>
     <a:masterClrMapping/>
   </p:clrMapOvr>
-  <p:timing>
-    <p:tnLst>
-      <p:par>
-        <p:cTn id="1" dur="indefinite" restart="never" nodeType="tmRoot"/>
-      </p:par>
-    </p:tnLst>
-  </p:timing>
 </p:sld>
 </file>
 
@@ -6581,7 +6472,7 @@
             </a:duotone>
             <a:extLst>
               <a:ext uri="{28A0092B-C50C-407E-A947-70E740481C1C}">
-                <a14:useLocalDpi xmlns:a14="http://schemas.microsoft.com/office/drawing/2010/main" xmlns="" val="0"/>
+                <a14:useLocalDpi xmlns:a14="http://schemas.microsoft.com/office/drawing/2010/main" val="0"/>
               </a:ext>
             </a:extLst>
           </a:blip>
@@ -6632,42 +6523,34 @@
                   <a:schemeClr val="bg1"/>
                 </a:solidFill>
               </a:rPr>
-              <a:t>Структура </a:t>
-            </a:r>
-            <a:r>
-              <a:rPr lang="ru-RU" sz="3600" dirty="0" smtClean="0">
+              <a:t>Структура БД</a:t>
+            </a:r>
+            <a:r>
+              <a:rPr lang="en-US" sz="3600" dirty="0">
                 <a:solidFill>
                   <a:schemeClr val="bg1"/>
                 </a:solidFill>
               </a:rPr>
-              <a:t>БД</a:t>
-            </a:r>
-            <a:r>
-              <a:rPr lang="en-US" sz="3600" dirty="0" smtClean="0">
+              <a:t> –</a:t>
+            </a:r>
+            <a:r>
+              <a:rPr lang="ru-RU" sz="3600" dirty="0">
                 <a:solidFill>
                   <a:schemeClr val="bg1"/>
                 </a:solidFill>
               </a:rPr>
-              <a:t> –</a:t>
-            </a:r>
-            <a:r>
-              <a:rPr lang="ru-RU" sz="3600" dirty="0" smtClean="0">
+              <a:t> </a:t>
+            </a:r>
+            <a:r>
+              <a:rPr lang="en-US" sz="3600" dirty="0">
                 <a:solidFill>
                   <a:schemeClr val="bg1"/>
                 </a:solidFill>
               </a:rPr>
-              <a:t> </a:t>
-            </a:r>
-            <a:r>
-              <a:rPr lang="en-US" sz="3600" dirty="0" smtClean="0">
-                <a:solidFill>
-                  <a:schemeClr val="bg1"/>
-                </a:solidFill>
-              </a:rPr>
               <a:t>ER </a:t>
             </a:r>
             <a:r>
-              <a:rPr lang="ru-RU" sz="3600" dirty="0" smtClean="0">
+              <a:rPr lang="ru-RU" sz="3600" dirty="0">
                 <a:solidFill>
                   <a:schemeClr val="bg1"/>
                 </a:solidFill>
@@ -6695,7 +6578,7 @@
           <a:blip r:embed="rId3" cstate="print">
             <a:extLst>
               <a:ext uri="{28A0092B-C50C-407E-A947-70E740481C1C}">
-                <a14:useLocalDpi xmlns:a14="http://schemas.microsoft.com/office/drawing/2010/main" xmlns="" val="0"/>
+                <a14:useLocalDpi xmlns:a14="http://schemas.microsoft.com/office/drawing/2010/main" val="0"/>
               </a:ext>
             </a:extLst>
           </a:blip>
@@ -6718,14 +6601,14 @@
           </a:ln>
           <a:extLst>
             <a:ext uri="{909E8E84-426E-40DD-AFC4-6F175D3DCCD1}">
-              <a14:hiddenFill xmlns:a14="http://schemas.microsoft.com/office/drawing/2010/main" xmlns="">
+              <a14:hiddenFill xmlns:a14="http://schemas.microsoft.com/office/drawing/2010/main">
                 <a:solidFill>
                   <a:srgbClr val="FFFFFF"/>
                 </a:solidFill>
               </a14:hiddenFill>
             </a:ext>
             <a:ext uri="{91240B29-F687-4F45-9708-019B960494DF}">
-              <a14:hiddenLine xmlns:a14="http://schemas.microsoft.com/office/drawing/2010/main" xmlns="" w="9525">
+              <a14:hiddenLine xmlns:a14="http://schemas.microsoft.com/office/drawing/2010/main" w="9525">
                 <a:solidFill>
                   <a:srgbClr val="000000"/>
                 </a:solidFill>
@@ -6740,20 +6623,13 @@
     </p:spTree>
     <p:extLst>
       <p:ext uri="{BB962C8B-B14F-4D97-AF65-F5344CB8AC3E}">
-        <p14:creationId xmlns:p14="http://schemas.microsoft.com/office/powerpoint/2010/main" xmlns="" val="2241943802"/>
+        <p14:creationId xmlns:p14="http://schemas.microsoft.com/office/powerpoint/2010/main" val="2241943802"/>
       </p:ext>
     </p:extLst>
   </p:cSld>
   <p:clrMapOvr>
     <a:masterClrMapping/>
   </p:clrMapOvr>
-  <p:timing>
-    <p:tnLst>
-      <p:par>
-        <p:cTn id="1" dur="indefinite" restart="never" nodeType="tmRoot"/>
-      </p:par>
-    </p:tnLst>
-  </p:timing>
 </p:sld>
 </file>
 
@@ -6793,7 +6669,7 @@
             </a:duotone>
             <a:extLst>
               <a:ext uri="{28A0092B-C50C-407E-A947-70E740481C1C}">
-                <a14:useLocalDpi xmlns:a14="http://schemas.microsoft.com/office/drawing/2010/main" xmlns="" val="0"/>
+                <a14:useLocalDpi xmlns:a14="http://schemas.microsoft.com/office/drawing/2010/main" val="0"/>
               </a:ext>
             </a:extLst>
           </a:blip>
@@ -6867,7 +6743,7 @@
           <a:blip r:embed="rId3" cstate="print">
             <a:extLst>
               <a:ext uri="{28A0092B-C50C-407E-A947-70E740481C1C}">
-                <a14:useLocalDpi xmlns:a14="http://schemas.microsoft.com/office/drawing/2010/main" xmlns="" val="0"/>
+                <a14:useLocalDpi xmlns:a14="http://schemas.microsoft.com/office/drawing/2010/main" val="0"/>
               </a:ext>
             </a:extLst>
           </a:blip>
@@ -6890,14 +6766,14 @@
           </a:ln>
           <a:extLst>
             <a:ext uri="{909E8E84-426E-40DD-AFC4-6F175D3DCCD1}">
-              <a14:hiddenFill xmlns:a14="http://schemas.microsoft.com/office/drawing/2010/main" xmlns="">
+              <a14:hiddenFill xmlns:a14="http://schemas.microsoft.com/office/drawing/2010/main">
                 <a:solidFill>
                   <a:srgbClr val="FFFFFF"/>
                 </a:solidFill>
               </a14:hiddenFill>
             </a:ext>
             <a:ext uri="{91240B29-F687-4F45-9708-019B960494DF}">
-              <a14:hiddenLine xmlns:a14="http://schemas.microsoft.com/office/drawing/2010/main" xmlns="" w="9525">
+              <a14:hiddenLine xmlns:a14="http://schemas.microsoft.com/office/drawing/2010/main" w="9525">
                 <a:solidFill>
                   <a:srgbClr val="000000"/>
                 </a:solidFill>
@@ -6921,7 +6797,7 @@
           <a:blip r:embed="rId4" cstate="print">
             <a:extLst>
               <a:ext uri="{28A0092B-C50C-407E-A947-70E740481C1C}">
-                <a14:useLocalDpi xmlns:a14="http://schemas.microsoft.com/office/drawing/2010/main" xmlns="" val="0"/>
+                <a14:useLocalDpi xmlns:a14="http://schemas.microsoft.com/office/drawing/2010/main" val="0"/>
               </a:ext>
             </a:extLst>
           </a:blip>
@@ -6944,14 +6820,14 @@
           </a:ln>
           <a:extLst>
             <a:ext uri="{909E8E84-426E-40DD-AFC4-6F175D3DCCD1}">
-              <a14:hiddenFill xmlns:a14="http://schemas.microsoft.com/office/drawing/2010/main" xmlns="">
+              <a14:hiddenFill xmlns:a14="http://schemas.microsoft.com/office/drawing/2010/main">
                 <a:solidFill>
                   <a:srgbClr val="FFFFFF"/>
                 </a:solidFill>
               </a14:hiddenFill>
             </a:ext>
             <a:ext uri="{91240B29-F687-4F45-9708-019B960494DF}">
-              <a14:hiddenLine xmlns:a14="http://schemas.microsoft.com/office/drawing/2010/main" xmlns="" w="9525">
+              <a14:hiddenLine xmlns:a14="http://schemas.microsoft.com/office/drawing/2010/main" w="9525">
                 <a:solidFill>
                   <a:srgbClr val="000000"/>
                 </a:solidFill>
@@ -6966,20 +6842,13 @@
     </p:spTree>
     <p:extLst>
       <p:ext uri="{BB962C8B-B14F-4D97-AF65-F5344CB8AC3E}">
-        <p14:creationId xmlns:p14="http://schemas.microsoft.com/office/powerpoint/2010/main" xmlns="" val="3796881437"/>
+        <p14:creationId xmlns:p14="http://schemas.microsoft.com/office/powerpoint/2010/main" val="3796881437"/>
       </p:ext>
     </p:extLst>
   </p:cSld>
   <p:clrMapOvr>
     <a:masterClrMapping/>
   </p:clrMapOvr>
-  <p:timing>
-    <p:tnLst>
-      <p:par>
-        <p:cTn id="1" dur="indefinite" restart="never" nodeType="tmRoot"/>
-      </p:par>
-    </p:tnLst>
-  </p:timing>
 </p:sld>
 </file>
 
@@ -7019,7 +6888,7 @@
             </a:duotone>
             <a:extLst>
               <a:ext uri="{28A0092B-C50C-407E-A947-70E740481C1C}">
-                <a14:useLocalDpi xmlns:a14="http://schemas.microsoft.com/office/drawing/2010/main" xmlns="" val="0"/>
+                <a14:useLocalDpi xmlns:a14="http://schemas.microsoft.com/office/drawing/2010/main" val="0"/>
               </a:ext>
             </a:extLst>
           </a:blip>
@@ -7093,7 +6962,7 @@
           <a:blip r:embed="rId3" cstate="print">
             <a:extLst>
               <a:ext uri="{28A0092B-C50C-407E-A947-70E740481C1C}">
-                <a14:useLocalDpi xmlns:a14="http://schemas.microsoft.com/office/drawing/2010/main" xmlns="" val="0"/>
+                <a14:useLocalDpi xmlns:a14="http://schemas.microsoft.com/office/drawing/2010/main" val="0"/>
               </a:ext>
             </a:extLst>
           </a:blip>
@@ -7116,14 +6985,14 @@
           </a:ln>
           <a:extLst>
             <a:ext uri="{909E8E84-426E-40DD-AFC4-6F175D3DCCD1}">
-              <a14:hiddenFill xmlns:a14="http://schemas.microsoft.com/office/drawing/2010/main" xmlns="">
+              <a14:hiddenFill xmlns:a14="http://schemas.microsoft.com/office/drawing/2010/main">
                 <a:solidFill>
                   <a:srgbClr val="FFFFFF"/>
                 </a:solidFill>
               </a14:hiddenFill>
             </a:ext>
             <a:ext uri="{91240B29-F687-4F45-9708-019B960494DF}">
-              <a14:hiddenLine xmlns:a14="http://schemas.microsoft.com/office/drawing/2010/main" xmlns="" w="9525">
+              <a14:hiddenLine xmlns:a14="http://schemas.microsoft.com/office/drawing/2010/main" w="9525">
                 <a:solidFill>
                   <a:srgbClr val="000000"/>
                 </a:solidFill>
@@ -7147,7 +7016,7 @@
           <a:blip r:embed="rId4" cstate="print">
             <a:extLst>
               <a:ext uri="{28A0092B-C50C-407E-A947-70E740481C1C}">
-                <a14:useLocalDpi xmlns:a14="http://schemas.microsoft.com/office/drawing/2010/main" xmlns="" val="0"/>
+                <a14:useLocalDpi xmlns:a14="http://schemas.microsoft.com/office/drawing/2010/main" val="0"/>
               </a:ext>
             </a:extLst>
           </a:blip>
@@ -7170,14 +7039,14 @@
           </a:ln>
           <a:extLst>
             <a:ext uri="{909E8E84-426E-40DD-AFC4-6F175D3DCCD1}">
-              <a14:hiddenFill xmlns:a14="http://schemas.microsoft.com/office/drawing/2010/main" xmlns="">
+              <a14:hiddenFill xmlns:a14="http://schemas.microsoft.com/office/drawing/2010/main">
                 <a:solidFill>
                   <a:srgbClr val="FFFFFF"/>
                 </a:solidFill>
               </a14:hiddenFill>
             </a:ext>
             <a:ext uri="{91240B29-F687-4F45-9708-019B960494DF}">
-              <a14:hiddenLine xmlns:a14="http://schemas.microsoft.com/office/drawing/2010/main" xmlns="" w="9525">
+              <a14:hiddenLine xmlns:a14="http://schemas.microsoft.com/office/drawing/2010/main" w="9525">
                 <a:solidFill>
                   <a:srgbClr val="000000"/>
                 </a:solidFill>
@@ -7192,20 +7061,13 @@
     </p:spTree>
     <p:extLst>
       <p:ext uri="{BB962C8B-B14F-4D97-AF65-F5344CB8AC3E}">
-        <p14:creationId xmlns:p14="http://schemas.microsoft.com/office/powerpoint/2010/main" xmlns="" val="2950107923"/>
+        <p14:creationId xmlns:p14="http://schemas.microsoft.com/office/powerpoint/2010/main" val="2950107923"/>
       </p:ext>
     </p:extLst>
   </p:cSld>
   <p:clrMapOvr>
     <a:masterClrMapping/>
   </p:clrMapOvr>
-  <p:timing>
-    <p:tnLst>
-      <p:par>
-        <p:cTn id="1" dur="indefinite" restart="never" nodeType="tmRoot"/>
-      </p:par>
-    </p:tnLst>
-  </p:timing>
 </p:sld>
 </file>
 
@@ -7245,7 +7107,7 @@
             </a:duotone>
             <a:extLst>
               <a:ext uri="{28A0092B-C50C-407E-A947-70E740481C1C}">
-                <a14:useLocalDpi xmlns:a14="http://schemas.microsoft.com/office/drawing/2010/main" xmlns="" val="0"/>
+                <a14:useLocalDpi xmlns:a14="http://schemas.microsoft.com/office/drawing/2010/main" val="0"/>
               </a:ext>
             </a:extLst>
           </a:blip>
@@ -7319,7 +7181,7 @@
           <a:blip r:embed="rId3" cstate="print">
             <a:extLst>
               <a:ext uri="{28A0092B-C50C-407E-A947-70E740481C1C}">
-                <a14:useLocalDpi xmlns:a14="http://schemas.microsoft.com/office/drawing/2010/main" xmlns="" val="0"/>
+                <a14:useLocalDpi xmlns:a14="http://schemas.microsoft.com/office/drawing/2010/main" val="0"/>
               </a:ext>
             </a:extLst>
           </a:blip>
@@ -7342,14 +7204,14 @@
           </a:ln>
           <a:extLst>
             <a:ext uri="{909E8E84-426E-40DD-AFC4-6F175D3DCCD1}">
-              <a14:hiddenFill xmlns:a14="http://schemas.microsoft.com/office/drawing/2010/main" xmlns="">
+              <a14:hiddenFill xmlns:a14="http://schemas.microsoft.com/office/drawing/2010/main">
                 <a:solidFill>
                   <a:srgbClr val="FFFFFF"/>
                 </a:solidFill>
               </a14:hiddenFill>
             </a:ext>
             <a:ext uri="{91240B29-F687-4F45-9708-019B960494DF}">
-              <a14:hiddenLine xmlns:a14="http://schemas.microsoft.com/office/drawing/2010/main" xmlns="" w="9525">
+              <a14:hiddenLine xmlns:a14="http://schemas.microsoft.com/office/drawing/2010/main" w="9525">
                 <a:solidFill>
                   <a:srgbClr val="000000"/>
                 </a:solidFill>
@@ -7373,7 +7235,7 @@
           <a:blip r:embed="rId4" cstate="print">
             <a:extLst>
               <a:ext uri="{28A0092B-C50C-407E-A947-70E740481C1C}">
-                <a14:useLocalDpi xmlns:a14="http://schemas.microsoft.com/office/drawing/2010/main" xmlns="" val="0"/>
+                <a14:useLocalDpi xmlns:a14="http://schemas.microsoft.com/office/drawing/2010/main" val="0"/>
               </a:ext>
             </a:extLst>
           </a:blip>
@@ -7396,14 +7258,14 @@
           </a:ln>
           <a:extLst>
             <a:ext uri="{909E8E84-426E-40DD-AFC4-6F175D3DCCD1}">
-              <a14:hiddenFill xmlns:a14="http://schemas.microsoft.com/office/drawing/2010/main" xmlns="">
+              <a14:hiddenFill xmlns:a14="http://schemas.microsoft.com/office/drawing/2010/main">
                 <a:solidFill>
                   <a:srgbClr val="FFFFFF"/>
                 </a:solidFill>
               </a14:hiddenFill>
             </a:ext>
             <a:ext uri="{91240B29-F687-4F45-9708-019B960494DF}">
-              <a14:hiddenLine xmlns:a14="http://schemas.microsoft.com/office/drawing/2010/main" xmlns="" w="9525">
+              <a14:hiddenLine xmlns:a14="http://schemas.microsoft.com/office/drawing/2010/main" w="9525">
                 <a:solidFill>
                   <a:srgbClr val="000000"/>
                 </a:solidFill>
@@ -7418,20 +7280,13 @@
     </p:spTree>
     <p:extLst>
       <p:ext uri="{BB962C8B-B14F-4D97-AF65-F5344CB8AC3E}">
-        <p14:creationId xmlns:p14="http://schemas.microsoft.com/office/powerpoint/2010/main" xmlns="" val="1677499634"/>
+        <p14:creationId xmlns:p14="http://schemas.microsoft.com/office/powerpoint/2010/main" val="1677499634"/>
       </p:ext>
     </p:extLst>
   </p:cSld>
   <p:clrMapOvr>
     <a:masterClrMapping/>
   </p:clrMapOvr>
-  <p:timing>
-    <p:tnLst>
-      <p:par>
-        <p:cTn id="1" dur="indefinite" restart="never" nodeType="tmRoot"/>
-      </p:par>
-    </p:tnLst>
-  </p:timing>
 </p:sld>
 </file>
 
@@ -7471,7 +7326,7 @@
             </a:duotone>
             <a:extLst>
               <a:ext uri="{28A0092B-C50C-407E-A947-70E740481C1C}">
-                <a14:useLocalDpi xmlns:a14="http://schemas.microsoft.com/office/drawing/2010/main" xmlns="" val="0"/>
+                <a14:useLocalDpi xmlns:a14="http://schemas.microsoft.com/office/drawing/2010/main" val="0"/>
               </a:ext>
             </a:extLst>
           </a:blip>
@@ -7560,7 +7415,7 @@
               </a:lnSpc>
             </a:pPr>
             <a:r>
-              <a:rPr lang="ru-RU" sz="2400" dirty="0" smtClean="0">
+              <a:rPr lang="ru-RU" sz="2400" dirty="0">
                 <a:effectLst/>
                 <a:latin typeface="Times New Roman" panose="02020603050405020304" pitchFamily="18" charset="0"/>
                 <a:ea typeface="Times New Roman" panose="02020603050405020304" pitchFamily="18" charset="0"/>
@@ -7575,7 +7430,7 @@
               </a:lnSpc>
             </a:pPr>
             <a:r>
-              <a:rPr lang="ru-RU" sz="2400" dirty="0" smtClean="0">
+              <a:rPr lang="ru-RU" sz="2400" dirty="0">
                 <a:effectLst/>
                 <a:latin typeface="Times New Roman" panose="02020603050405020304" pitchFamily="18" charset="0"/>
                 <a:ea typeface="Times New Roman" panose="02020603050405020304" pitchFamily="18" charset="0"/>
@@ -7590,7 +7445,7 @@
               </a:lnSpc>
             </a:pPr>
             <a:r>
-              <a:rPr lang="ru-RU" sz="2400" dirty="0" smtClean="0">
+              <a:rPr lang="ru-RU" sz="2400" dirty="0">
                 <a:effectLst/>
                 <a:latin typeface="Times New Roman" panose="02020603050405020304" pitchFamily="18" charset="0"/>
                 <a:ea typeface="Times New Roman" panose="02020603050405020304" pitchFamily="18" charset="0"/>
@@ -7605,7 +7460,7 @@
               </a:lnSpc>
             </a:pPr>
             <a:r>
-              <a:rPr lang="ru-RU" sz="2400" dirty="0" smtClean="0">
+              <a:rPr lang="ru-RU" sz="2400" dirty="0">
                 <a:effectLst/>
                 <a:latin typeface="Times New Roman" panose="02020603050405020304" pitchFamily="18" charset="0"/>
                 <a:ea typeface="Times New Roman" panose="02020603050405020304" pitchFamily="18" charset="0"/>
@@ -7628,7 +7483,7 @@
           <a:blip r:embed="rId3" cstate="print">
             <a:extLst>
               <a:ext uri="{28A0092B-C50C-407E-A947-70E740481C1C}">
-                <a14:useLocalDpi xmlns:a14="http://schemas.microsoft.com/office/drawing/2010/main" xmlns="" val="0"/>
+                <a14:useLocalDpi xmlns:a14="http://schemas.microsoft.com/office/drawing/2010/main" val="0"/>
               </a:ext>
             </a:extLst>
           </a:blip>
@@ -7651,14 +7506,14 @@
           </a:ln>
           <a:extLst>
             <a:ext uri="{909E8E84-426E-40DD-AFC4-6F175D3DCCD1}">
-              <a14:hiddenFill xmlns:a14="http://schemas.microsoft.com/office/drawing/2010/main" xmlns="">
+              <a14:hiddenFill xmlns:a14="http://schemas.microsoft.com/office/drawing/2010/main">
                 <a:solidFill>
                   <a:srgbClr val="FFFFFF"/>
                 </a:solidFill>
               </a14:hiddenFill>
             </a:ext>
             <a:ext uri="{91240B29-F687-4F45-9708-019B960494DF}">
-              <a14:hiddenLine xmlns:a14="http://schemas.microsoft.com/office/drawing/2010/main" xmlns="" w="9525">
+              <a14:hiddenLine xmlns:a14="http://schemas.microsoft.com/office/drawing/2010/main" w="9525">
                 <a:solidFill>
                   <a:srgbClr val="000000"/>
                 </a:solidFill>
@@ -7673,20 +7528,13 @@
     </p:spTree>
     <p:extLst>
       <p:ext uri="{BB962C8B-B14F-4D97-AF65-F5344CB8AC3E}">
-        <p14:creationId xmlns:p14="http://schemas.microsoft.com/office/powerpoint/2010/main" xmlns="" val="3903636034"/>
+        <p14:creationId xmlns:p14="http://schemas.microsoft.com/office/powerpoint/2010/main" val="3903636034"/>
       </p:ext>
     </p:extLst>
   </p:cSld>
   <p:clrMapOvr>
     <a:masterClrMapping/>
   </p:clrMapOvr>
-  <p:timing>
-    <p:tnLst>
-      <p:par>
-        <p:cTn id="1" dur="indefinite" restart="never" nodeType="tmRoot"/>
-      </p:par>
-    </p:tnLst>
-  </p:timing>
 </p:sld>
 </file>
 
@@ -7946,7 +7794,7 @@
   <a:extraClrSchemeLst/>
   <a:extLst>
     <a:ext uri="{05A4C25C-085E-4340-85A3-A5531E510DB2}">
-      <thm15:themeFamily xmlns:thm15="http://schemas.microsoft.com/office/thememl/2012/main" xmlns="" name="Banded" id="{98DFF888-2449-4D28-977C-6306C017633E}" vid="{B7CF026C-957E-4F4E-893C-D02C23AB6317}"/>
+      <thm15:themeFamily xmlns:thm15="http://schemas.microsoft.com/office/thememl/2012/main" name="Banded" id="{98DFF888-2449-4D28-977C-6306C017633E}" vid="{B7CF026C-957E-4F4E-893C-D02C23AB6317}"/>
     </a:ext>
   </a:extLst>
 </a:theme>
